--- a/Configurable_Static_Type_Checking_for_Forth.pptx
+++ b/Configurable_Static_Type_Checking_for_Forth.pptx
@@ -4,24 +4,23 @@
   <p:sldMasterIdLst>
     <p:sldMasterId id="2147483648" r:id="rId1"/>
   </p:sldMasterIdLst>
+  <p:notesMasterIdLst>
+    <p:notesMasterId r:id="rId13"/>
+  </p:notesMasterIdLst>
   <p:sldIdLst>
     <p:sldId id="256" r:id="rId2"/>
     <p:sldId id="257" r:id="rId3"/>
     <p:sldId id="258" r:id="rId4"/>
-    <p:sldId id="259" r:id="rId5"/>
-    <p:sldId id="260" r:id="rId6"/>
-    <p:sldId id="261" r:id="rId7"/>
+    <p:sldId id="261" r:id="rId5"/>
+    <p:sldId id="259" r:id="rId6"/>
+    <p:sldId id="260" r:id="rId7"/>
     <p:sldId id="262" r:id="rId8"/>
-    <p:sldId id="263" r:id="rId9"/>
-    <p:sldId id="264" r:id="rId10"/>
-    <p:sldId id="265" r:id="rId11"/>
-    <p:sldId id="266" r:id="rId12"/>
-    <p:sldId id="267" r:id="rId13"/>
+    <p:sldId id="264" r:id="rId9"/>
+    <p:sldId id="265" r:id="rId10"/>
+    <p:sldId id="266" r:id="rId11"/>
+    <p:sldId id="267" r:id="rId12"/>
   </p:sldIdLst>
-  <p:notesMasterIdLst>
-    <p:notesMasterId r:id="rId14"/>
-  </p:notesMasterIdLst>
-  <p:sldSz cx="9144000" cy="5143500"/>
+  <p:sldSz cx="9144000" cy="5143500" type="screen16x9"/>
   <p:notesSz cx="5143500" cy="9144000"/>
   <p:defaultTextStyle>
     <a:lvl1pPr marL="0" algn="l" defTabSz="914400" rtl="0" eaLnBrk="1" latinLnBrk="0" hangingPunct="1">
@@ -115,6 +114,11 @@
       </a:defRPr>
     </a:lvl9pPr>
   </p:defaultTextStyle>
+  <p:extLst>
+    <p:ext uri="{EFAFB233-063F-42B5-8137-9DF3F51BA10A}">
+      <p15:sldGuideLst xmlns:p15="http://schemas.microsoft.com/office/powerpoint/2012/main"/>
+    </p:ext>
+  </p:extLst>
 </p:presentation>
 </file>
 
@@ -140,234 +144,10 @@
           <a:chExt cx="0" cy="0"/>
         </a:xfrm>
       </p:grpSpPr>
-      <p:sp>
-        <p:nvSpPr>
-          <p:cNvPr id="2" name="Header Placeholder 1"/>
-          <p:cNvSpPr>
-            <a:spLocks noGrp="1"/>
-          </p:cNvSpPr>
-          <p:nvPr>
-            <p:ph type="hdr" sz="quarter"/>
-          </p:nvPr>
-        </p:nvSpPr>
-        <p:spPr>
-          <a:xfrm>
-            <a:off x="0" y="0"/>
-            <a:ext cx="2971800" cy="458788"/>
-          </a:xfrm>
-          <a:prstGeom prst="rect">
-            <a:avLst/>
-          </a:prstGeom>
-        </p:spPr>
-        <p:txBody>
-          <a:bodyPr vert="horz" lIns="91440" tIns="45720" rIns="91440" bIns="45720" rtlCol="0"/>
-          <a:lstStyle>
-            <a:lvl1pPr algn="l">
-              <a:defRPr sz="1200"/>
-            </a:lvl1pPr>
-          </a:lstStyle>
-          <a:p>
-            <a:endParaRPr lang="en-US"/>
-          </a:p>
-        </p:txBody>
-      </p:sp>
-      <p:sp>
-        <p:nvSpPr>
-          <p:cNvPr id="3" name="Date Placeholder 2"/>
-          <p:cNvSpPr>
-            <a:spLocks noGrp="1"/>
-          </p:cNvSpPr>
-          <p:nvPr>
-            <p:ph type="dt" idx="1"/>
-          </p:nvPr>
-        </p:nvSpPr>
-        <p:spPr>
-          <a:xfrm>
-            <a:off x="3884613" y="0"/>
-            <a:ext cx="2971800" cy="458788"/>
-          </a:xfrm>
-          <a:prstGeom prst="rect">
-            <a:avLst/>
-          </a:prstGeom>
-        </p:spPr>
-        <p:txBody>
-          <a:bodyPr vert="horz" lIns="91440" tIns="45720" rIns="91440" bIns="45720" rtlCol="0"/>
-          <a:lstStyle>
-            <a:lvl1pPr algn="r">
-              <a:defRPr sz="1200"/>
-            </a:lvl1pPr>
-          </a:lstStyle>
-          <a:p>
-            <a:fld id="{5282F153-3F37-0F45-9E97-73ACFA13230C}" type="datetimeFigureOut">
-              <a:rPr lang="en-US"/>
-              <a:t>7/23/19</a:t>
-            </a:fld>
-            <a:endParaRPr lang="en-US"/>
-          </a:p>
-        </p:txBody>
-      </p:sp>
-      <p:sp>
-        <p:nvSpPr>
-          <p:cNvPr id="4" name="Slide Image Placeholder 3"/>
-          <p:cNvSpPr>
-            <a:spLocks noGrp="1" noRot="1" noChangeAspect="1"/>
-          </p:cNvSpPr>
-          <p:nvPr>
-            <p:ph type="sldImg" idx="2"/>
-          </p:nvPr>
-        </p:nvSpPr>
-        <p:spPr>
-          <a:xfrm>
-            <a:off x="685800" y="1143000"/>
-            <a:ext cx="5486400" cy="3086100"/>
-          </a:xfrm>
-          <a:prstGeom prst="rect">
-            <a:avLst/>
-          </a:prstGeom>
-          <a:noFill/>
-          <a:ln w="12700">
-            <a:solidFill>
-              <a:prstClr val="black"/>
-            </a:solidFill>
-          </a:ln>
-        </p:spPr>
-        <p:txBody>
-          <a:bodyPr vert="horz" lIns="91440" tIns="45720" rIns="91440" bIns="45720" rtlCol="0" anchor="ctr"/>
-          <a:lstStyle/>
-          <a:p>
-            <a:endParaRPr lang="en-US"/>
-          </a:p>
-        </p:txBody>
-      </p:sp>
-      <p:sp>
-        <p:nvSpPr>
-          <p:cNvPr id="5" name="Notes Placeholder 4"/>
-          <p:cNvSpPr>
-            <a:spLocks noGrp="1"/>
-          </p:cNvSpPr>
-          <p:nvPr>
-            <p:ph type="body" sz="quarter" idx="3"/>
-          </p:nvPr>
-        </p:nvSpPr>
-        <p:spPr>
-          <a:xfrm>
-            <a:off x="685800" y="4400550"/>
-            <a:ext cx="5486400" cy="3600450"/>
-          </a:xfrm>
-          <a:prstGeom prst="rect">
-            <a:avLst/>
-          </a:prstGeom>
-        </p:spPr>
-        <p:txBody>
-          <a:bodyPr vert="horz" lIns="91440" tIns="45720" rIns="91440" bIns="45720" rtlCol="0"/>
-          <a:lstStyle/>
-          <a:p>
-            <a:pPr lvl="0"/>
-            <a:r>
-              <a:rPr lang="en-US"/>
-              <a:t>Click to edit Master text styles</a:t>
-            </a:r>
-          </a:p>
-          <a:p>
-            <a:pPr lvl="1"/>
-            <a:r>
-              <a:rPr lang="en-US"/>
-              <a:t>Second level</a:t>
-            </a:r>
-          </a:p>
-          <a:p>
-            <a:pPr lvl="2"/>
-            <a:r>
-              <a:rPr lang="en-US"/>
-              <a:t>Third level</a:t>
-            </a:r>
-          </a:p>
-          <a:p>
-            <a:pPr lvl="3"/>
-            <a:r>
-              <a:rPr lang="en-US"/>
-              <a:t>Fourth level</a:t>
-            </a:r>
-          </a:p>
-          <a:p>
-            <a:pPr lvl="4"/>
-            <a:r>
-              <a:rPr lang="en-US"/>
-              <a:t>Fifth level</a:t>
-            </a:r>
-          </a:p>
-        </p:txBody>
-      </p:sp>
-      <p:sp>
-        <p:nvSpPr>
-          <p:cNvPr id="6" name="Footer Placeholder 5"/>
-          <p:cNvSpPr>
-            <a:spLocks noGrp="1"/>
-          </p:cNvSpPr>
-          <p:nvPr>
-            <p:ph type="ftr" sz="quarter" idx="4"/>
-          </p:nvPr>
-        </p:nvSpPr>
-        <p:spPr>
-          <a:xfrm>
-            <a:off x="0" y="8685213"/>
-            <a:ext cx="2971800" cy="458787"/>
-          </a:xfrm>
-          <a:prstGeom prst="rect">
-            <a:avLst/>
-          </a:prstGeom>
-        </p:spPr>
-        <p:txBody>
-          <a:bodyPr vert="horz" lIns="91440" tIns="45720" rIns="91440" bIns="45720" rtlCol="0" anchor="b"/>
-          <a:lstStyle>
-            <a:lvl1pPr algn="l">
-              <a:defRPr sz="1200"/>
-            </a:lvl1pPr>
-          </a:lstStyle>
-          <a:p>
-            <a:endParaRPr lang="en-US"/>
-          </a:p>
-        </p:txBody>
-      </p:sp>
-      <p:sp>
-        <p:nvSpPr>
-          <p:cNvPr id="7" name="Slide Number Placeholder 6"/>
-          <p:cNvSpPr>
-            <a:spLocks noGrp="1"/>
-          </p:cNvSpPr>
-          <p:nvPr>
-            <p:ph type="sldNum" sz="quarter" idx="5"/>
-          </p:nvPr>
-        </p:nvSpPr>
-        <p:spPr>
-          <a:xfrm>
-            <a:off x="3884613" y="8685213"/>
-            <a:ext cx="2971800" cy="458787"/>
-          </a:xfrm>
-          <a:prstGeom prst="rect">
-            <a:avLst/>
-          </a:prstGeom>
-        </p:spPr>
-        <p:txBody>
-          <a:bodyPr vert="horz" lIns="91440" tIns="45720" rIns="91440" bIns="45720" rtlCol="0" anchor="b"/>
-          <a:lstStyle>
-            <a:lvl1pPr algn="r">
-              <a:defRPr sz="1200"/>
-            </a:lvl1pPr>
-          </a:lstStyle>
-          <a:p>
-            <a:fld id="{CE5E9CC1-C706-0F49-92D6-E571CC5EEA8F}" type="slidenum">
-              <a:rPr lang="en-US"/>
-              <a:t>‹#›</a:t>
-            </a:fld>
-            <a:endParaRPr lang="en-US"/>
-          </a:p>
-        </p:txBody>
-      </p:sp>
     </p:spTree>
     <p:extLst>
       <p:ext uri="{BB962C8B-B14F-4D97-AF65-F5344CB8AC3E}">
-        <p14:creationId xmlns:p14="http://schemas.microsoft.com/office/powerpoint/2010/main" val="1024086991"/>
+        <p14:creationId xmlns:p14="http://schemas.microsoft.com/office/powerpoint/2010/main" val="1755966490"/>
       </p:ext>
     </p:extLst>
   </p:cSld>
@@ -511,10 +291,6 @@
           <a:bodyPr/>
           <a:lstStyle/>
           <a:p>
-            <a:r>
-              <a:rPr lang="en-US" dirty="0"/>
-              <a:t/>
-            </a:r>
             <a:endParaRPr lang="en-US" dirty="0"/>
           </a:p>
         </p:txBody>
@@ -599,10 +375,6 @@
           <a:bodyPr/>
           <a:lstStyle/>
           <a:p>
-            <a:r>
-              <a:rPr lang="en-US" dirty="0"/>
-              <a:t/>
-            </a:r>
             <a:endParaRPr lang="en-US" dirty="0"/>
           </a:p>
         </p:txBody>
@@ -687,10 +459,6 @@
           <a:bodyPr/>
           <a:lstStyle/>
           <a:p>
-            <a:r>
-              <a:rPr lang="en-US" dirty="0"/>
-              <a:t/>
-            </a:r>
             <a:endParaRPr lang="en-US" dirty="0"/>
           </a:p>
         </p:txBody>
@@ -713,94 +481,6 @@
             <a:fld id="{F7021451-1387-4CA6-816F-3879F97B5CBC}" type="slidenum">
               <a:rPr lang="en-US"/>
               <a:t>11</a:t>
-            </a:fld>
-            <a:endParaRPr lang="en-US"/>
-          </a:p>
-        </p:txBody>
-      </p:sp>
-    </p:spTree>
-    <p:extLst>
-      <p:ext uri="{BB962C8B-B14F-4D97-AF65-F5344CB8AC3E}">
-        <p14:creationId xmlns:p14="http://schemas.microsoft.com/office/powerpoint/2010/main" val="1024086991"/>
-      </p:ext>
-    </p:extLst>
-  </p:cSld>
-  <p:clrMapOvr>
-    <a:masterClrMapping/>
-  </p:clrMapOvr>
-</p:notes>
-</file>
-
-<file path=ppt/notesSlides/notesSlide12.xml><?xml version="1.0" encoding="utf-8"?>
-<p:notes xmlns:a="http://schemas.openxmlformats.org/drawingml/2006/main" xmlns:r="http://schemas.openxmlformats.org/officeDocument/2006/relationships" xmlns:p="http://schemas.openxmlformats.org/presentationml/2006/main">
-  <p:cSld>
-    <p:spTree>
-      <p:nvGrpSpPr>
-        <p:cNvPr id="1" name=""/>
-        <p:cNvGrpSpPr/>
-        <p:nvPr/>
-      </p:nvGrpSpPr>
-      <p:grpSpPr>
-        <a:xfrm>
-          <a:off x="0" y="0"/>
-          <a:ext cx="0" cy="0"/>
-          <a:chOff x="0" y="0"/>
-          <a:chExt cx="0" cy="0"/>
-        </a:xfrm>
-      </p:grpSpPr>
-      <p:sp>
-        <p:nvSpPr>
-          <p:cNvPr id="2" name="Slide Image Placeholder 1"/>
-          <p:cNvSpPr>
-            <a:spLocks noGrp="1" noRot="1" noChangeAspect="1"/>
-          </p:cNvSpPr>
-          <p:nvPr>
-            <p:ph type="sldImg"/>
-          </p:nvPr>
-        </p:nvSpPr>
-        <p:spPr/>
-      </p:sp>
-      <p:sp>
-        <p:nvSpPr>
-          <p:cNvPr id="3" name="Notes Placeholder 2"/>
-          <p:cNvSpPr>
-            <a:spLocks noGrp="1"/>
-          </p:cNvSpPr>
-          <p:nvPr>
-            <p:ph type="body" idx="1"/>
-          </p:nvPr>
-        </p:nvSpPr>
-        <p:spPr/>
-        <p:txBody>
-          <a:bodyPr/>
-          <a:lstStyle/>
-          <a:p>
-            <a:r>
-              <a:rPr lang="en-US" dirty="0"/>
-              <a:t/>
-            </a:r>
-            <a:endParaRPr lang="en-US" dirty="0"/>
-          </a:p>
-        </p:txBody>
-      </p:sp>
-      <p:sp>
-        <p:nvSpPr>
-          <p:cNvPr id="4" name="Slide Number Placeholder 3"/>
-          <p:cNvSpPr>
-            <a:spLocks noGrp="1"/>
-          </p:cNvSpPr>
-          <p:nvPr>
-            <p:ph type="sldNum" sz="quarter" idx="10"/>
-          </p:nvPr>
-        </p:nvSpPr>
-        <p:spPr/>
-        <p:txBody>
-          <a:bodyPr/>
-          <a:lstStyle/>
-          <a:p>
-            <a:fld id="{F7021451-1387-4CA6-816F-3879F97B5CBC}" type="slidenum">
-              <a:rPr lang="en-US"/>
-              <a:t>12</a:t>
             </a:fld>
             <a:endParaRPr lang="en-US"/>
           </a:p>
@@ -863,10 +543,6 @@
           <a:bodyPr/>
           <a:lstStyle/>
           <a:p>
-            <a:r>
-              <a:rPr lang="en-US" dirty="0"/>
-              <a:t/>
-            </a:r>
             <a:endParaRPr lang="en-US" dirty="0"/>
           </a:p>
         </p:txBody>
@@ -951,10 +627,6 @@
           <a:bodyPr/>
           <a:lstStyle/>
           <a:p>
-            <a:r>
-              <a:rPr lang="en-US" dirty="0"/>
-              <a:t/>
-            </a:r>
             <a:endParaRPr lang="en-US" dirty="0"/>
           </a:p>
         </p:txBody>
@@ -1039,10 +711,6 @@
           <a:bodyPr/>
           <a:lstStyle/>
           <a:p>
-            <a:r>
-              <a:rPr lang="en-US" dirty="0"/>
-              <a:t/>
-            </a:r>
             <a:endParaRPr lang="en-US" dirty="0"/>
           </a:p>
         </p:txBody>
@@ -1127,10 +795,6 @@
           <a:bodyPr/>
           <a:lstStyle/>
           <a:p>
-            <a:r>
-              <a:rPr lang="en-US" dirty="0"/>
-              <a:t/>
-            </a:r>
             <a:endParaRPr lang="en-US" dirty="0"/>
           </a:p>
         </p:txBody>
@@ -1215,10 +879,6 @@
           <a:bodyPr/>
           <a:lstStyle/>
           <a:p>
-            <a:r>
-              <a:rPr lang="en-US" dirty="0"/>
-              <a:t/>
-            </a:r>
             <a:endParaRPr lang="en-US" dirty="0"/>
           </a:p>
         </p:txBody>
@@ -1303,10 +963,6 @@
           <a:bodyPr/>
           <a:lstStyle/>
           <a:p>
-            <a:r>
-              <a:rPr lang="en-US" dirty="0"/>
-              <a:t/>
-            </a:r>
             <a:endParaRPr lang="en-US" dirty="0"/>
           </a:p>
         </p:txBody>
@@ -1391,10 +1047,6 @@
           <a:bodyPr/>
           <a:lstStyle/>
           <a:p>
-            <a:r>
-              <a:rPr lang="en-US" dirty="0"/>
-              <a:t/>
-            </a:r>
             <a:endParaRPr lang="en-US" dirty="0"/>
           </a:p>
         </p:txBody>
@@ -1479,10 +1131,6 @@
           <a:bodyPr/>
           <a:lstStyle/>
           <a:p>
-            <a:r>
-              <a:rPr lang="en-US" dirty="0"/>
-              <a:t/>
-            </a:r>
             <a:endParaRPr lang="en-US" dirty="0"/>
           </a:p>
         </p:txBody>
@@ -1556,6 +1204,11 @@
 <file path=ppt/slideMasters/slideMaster1.xml><?xml version="1.0" encoding="utf-8"?>
 <p:sldMaster xmlns:a="http://schemas.openxmlformats.org/drawingml/2006/main" xmlns:r="http://schemas.openxmlformats.org/officeDocument/2006/relationships" xmlns:p="http://schemas.openxmlformats.org/presentationml/2006/main">
   <p:cSld>
+    <p:bg>
+      <p:bgRef idx="1001">
+        <a:schemeClr val="bg1"/>
+      </p:bgRef>
+    </p:bg>
     <p:spTree>
       <p:nvGrpSpPr>
         <p:cNvPr id="1" name=""/>
@@ -1849,14 +1502,14 @@
       </p:grpSpPr>
       <p:pic>
         <p:nvPicPr>
-          <p:cNvPr id="2" name="Image 0" descr="preencoded.png">    </p:cNvPr>
+          <p:cNvPr id="2" name="Image 0" descr="preencoded.png"/>
           <p:cNvPicPr>
             <a:picLocks noChangeAspect="1"/>
           </p:cNvPicPr>
           <p:nvPr/>
         </p:nvPicPr>
         <p:blipFill>
-          <a:blip r:embed="rId1"/>
+          <a:blip r:embed="rId3"/>
           <a:stretch>
             <a:fillRect/>
           </a:stretch>
@@ -1894,14 +1547,14 @@
           </a:bodyPr>
           <a:lstStyle/>
           <a:p>
-            <a:pPr algn="l" indent="0" marL="0">
+            <a:pPr marL="0" indent="0" algn="l">
               <a:lnSpc>
                 <a:spcPct val="84800"/>
               </a:lnSpc>
               <a:buNone/>
             </a:pPr>
             <a:r>
-              <a:rPr lang="en-US" sz="3400" spc="-1" kern="0" dirty="0">
+              <a:rPr lang="en-US" sz="3400" kern="0" spc="-1" dirty="0">
                 <a:solidFill>
                   <a:srgbClr val="003A70"/>
                 </a:solidFill>
@@ -1938,7 +1591,7 @@
           </a:bodyPr>
           <a:lstStyle/>
           <a:p>
-            <a:pPr algn="l" indent="0" marL="0">
+            <a:pPr marL="0" indent="0" algn="l">
               <a:lnSpc>
                 <a:spcPct val="102400"/>
               </a:lnSpc>
@@ -1982,7 +1635,7 @@
           </a:bodyPr>
           <a:lstStyle/>
           <a:p>
-            <a:pPr algn="l" indent="0" marL="0">
+            <a:pPr marL="0" indent="0" algn="l">
               <a:lnSpc>
                 <a:spcPct val="113600"/>
               </a:lnSpc>
@@ -1997,53 +1650,9 @@
                 <a:ea typeface="Calibri" pitchFamily="34" charset="-122"/>
                 <a:cs typeface="Calibri" pitchFamily="34" charset="-120"/>
               </a:rPr>
-              <a:t>Jaanus Pöial</a:t>
-            </a:r>
-            <a:r>
-              <a:rPr lang="en-US" sz="1200" dirty="0">
-                <a:solidFill>
-                  <a:srgbClr val="2F2F2F"/>
-                </a:solidFill>
-                <a:latin typeface="Calibri" pitchFamily="34" charset="0"/>
-                <a:ea typeface="Calibri" pitchFamily="34" charset="-122"/>
-                <a:cs typeface="Calibri" pitchFamily="34" charset="-120"/>
-              </a:rPr>
-              <a:t>
-</a:t>
-            </a:r>
-            <a:r>
-              <a:rPr lang="en-US" sz="1200" dirty="0">
-                <a:solidFill>
-                  <a:srgbClr val="2F2F2F"/>
-                </a:solidFill>
-                <a:latin typeface="Calibri" pitchFamily="34" charset="0"/>
-                <a:ea typeface="Calibri" pitchFamily="34" charset="-122"/>
-                <a:cs typeface="Calibri" pitchFamily="34" charset="-120"/>
-              </a:rPr>
-              <a:t>Tallinn University of Technology</a:t>
-            </a:r>
-            <a:r>
-              <a:rPr lang="en-US" sz="1200" dirty="0">
-                <a:solidFill>
-                  <a:srgbClr val="2F2F2F"/>
-                </a:solidFill>
-                <a:latin typeface="Calibri" pitchFamily="34" charset="0"/>
-                <a:ea typeface="Calibri" pitchFamily="34" charset="-122"/>
-                <a:cs typeface="Calibri" pitchFamily="34" charset="-120"/>
-              </a:rPr>
-              <a:t>
-</a:t>
-            </a:r>
-            <a:r>
-              <a:rPr lang="en-US" sz="1200" dirty="0">
-                <a:solidFill>
-                  <a:srgbClr val="2F2F2F"/>
-                </a:solidFill>
-                <a:latin typeface="Calibri" pitchFamily="34" charset="0"/>
-                <a:ea typeface="Calibri" pitchFamily="34" charset="-122"/>
-                <a:cs typeface="Calibri" pitchFamily="34" charset="-120"/>
-              </a:rPr>
-              <a:t>EuroForth 2026</a:t>
+              <a:t>Jaanus Pöial
+Tallinn University of Technology
+EuroForth 2026</a:t>
             </a:r>
             <a:endParaRPr lang="en-US" sz="1200" dirty="0"/>
           </a:p>
@@ -2058,659 +1667,6 @@
 </file>
 
 <file path=ppt/slides/slide10.xml><?xml version="1.0" encoding="utf-8"?>
-<p:sld xmlns:a="http://schemas.openxmlformats.org/drawingml/2006/main" xmlns:r="http://schemas.openxmlformats.org/officeDocument/2006/relationships" xmlns:p="http://schemas.openxmlformats.org/presentationml/2006/main">
-  <p:cSld name="Slide 10">
-    <p:spTree>
-      <p:nvGrpSpPr>
-        <p:cNvPr id="1" name=""/>
-        <p:cNvGrpSpPr/>
-        <p:nvPr/>
-      </p:nvGrpSpPr>
-      <p:grpSpPr>
-        <a:xfrm>
-          <a:off x="0" y="0"/>
-          <a:ext cx="0" cy="0"/>
-          <a:chOff x="0" y="0"/>
-          <a:chExt cx="0" cy="0"/>
-        </a:xfrm>
-      </p:grpSpPr>
-      <p:pic>
-        <p:nvPicPr>
-          <p:cNvPr id="2" name="Image 0" descr="preencoded.png">    </p:cNvPr>
-          <p:cNvPicPr>
-            <a:picLocks noChangeAspect="1"/>
-          </p:cNvPicPr>
-          <p:nvPr/>
-        </p:nvPicPr>
-        <p:blipFill>
-          <a:blip r:embed="rId1"/>
-          <a:stretch>
-            <a:fillRect/>
-          </a:stretch>
-        </p:blipFill>
-        <p:spPr>
-          <a:xfrm>
-            <a:off x="0" y="0"/>
-            <a:ext cx="9144000" cy="5143500"/>
-          </a:xfrm>
-          <a:prstGeom prst="rect">
-            <a:avLst/>
-          </a:prstGeom>
-        </p:spPr>
-      </p:pic>
-      <p:sp>
-        <p:nvSpPr>
-          <p:cNvPr id="3" name="Text 0"/>
-          <p:cNvSpPr/>
-          <p:nvPr/>
-        </p:nvSpPr>
-        <p:spPr>
-          <a:xfrm>
-            <a:off x="607219" y="321469"/>
-            <a:ext cx="7886700" cy="401166"/>
-          </a:xfrm>
-          <a:prstGeom prst="rect">
-            <a:avLst/>
-          </a:prstGeom>
-          <a:noFill/>
-          <a:ln/>
-        </p:spPr>
-        <p:txBody>
-          <a:bodyPr wrap="none" lIns="0" tIns="0" rIns="0" bIns="0" rtlCol="0" anchor="t">
-            <a:spAutoFit/>
-          </a:bodyPr>
-          <a:lstStyle/>
-          <a:p>
-            <a:pPr algn="l" indent="0" marL="0">
-              <a:lnSpc>
-                <a:spcPct val="83200"/>
-              </a:lnSpc>
-              <a:buNone/>
-            </a:pPr>
-            <a:r>
-              <a:rPr lang="en-US" sz="2950" dirty="0">
-                <a:solidFill>
-                  <a:srgbClr val="003A70"/>
-                </a:solidFill>
-                <a:latin typeface="Calibri Light" pitchFamily="34" charset="0"/>
-                <a:ea typeface="Calibri Light" pitchFamily="34" charset="-122"/>
-                <a:cs typeface="Calibri Light" pitchFamily="34" charset="-120"/>
-              </a:rPr>
-              <a:t>Loops use a one-versus-two test</a:t>
-            </a:r>
-            <a:endParaRPr lang="en-US" sz="2950" dirty="0"/>
-          </a:p>
-        </p:txBody>
-      </p:sp>
-      <p:sp>
-        <p:nvSpPr>
-          <p:cNvPr id="4" name="Text 1"/>
-          <p:cNvSpPr/>
-          <p:nvPr/>
-        </p:nvSpPr>
-        <p:spPr>
-          <a:xfrm>
-            <a:off x="607219" y="908372"/>
-            <a:ext cx="7886700" cy="167878"/>
-          </a:xfrm>
-          <a:prstGeom prst="rect">
-            <a:avLst/>
-          </a:prstGeom>
-          <a:noFill/>
-          <a:ln/>
-        </p:spPr>
-        <p:txBody>
-          <a:bodyPr wrap="square" lIns="0" tIns="0" rIns="0" bIns="0" rtlCol="0" anchor="t">
-            <a:spAutoFit/>
-          </a:bodyPr>
-          <a:lstStyle/>
-          <a:p>
-            <a:pPr algn="l" indent="0" marL="0">
-              <a:buNone/>
-            </a:pPr>
-            <a:r>
-              <a:rPr lang="en-US" sz="950" b="1" spc="1" kern="0" dirty="0">
-                <a:solidFill>
-                  <a:srgbClr val="00A3A1"/>
-                </a:solidFill>
-                <a:latin typeface="Calibri" pitchFamily="34" charset="0"/>
-                <a:ea typeface="Calibri" pitchFamily="34" charset="-122"/>
-                <a:cs typeface="Calibri" pitchFamily="34" charset="-120"/>
-              </a:rPr>
-              <a:t>LOOP INVARIANT</a:t>
-            </a:r>
-            <a:endParaRPr lang="en-US" sz="950" dirty="0"/>
-          </a:p>
-        </p:txBody>
-      </p:sp>
-      <p:sp>
-        <p:nvSpPr>
-          <p:cNvPr id="5" name="Text 2"/>
-          <p:cNvSpPr/>
-          <p:nvPr/>
-        </p:nvSpPr>
-        <p:spPr>
-          <a:xfrm>
-            <a:off x="607219" y="1147688"/>
-            <a:ext cx="7886700" cy="337152"/>
-          </a:xfrm>
-          <a:prstGeom prst="rect">
-            <a:avLst/>
-          </a:prstGeom>
-          <a:noFill/>
-          <a:ln/>
-        </p:spPr>
-        <p:txBody>
-          <a:bodyPr wrap="none" lIns="0" tIns="0" rIns="0" bIns="0" rtlCol="0" anchor="t">
-            <a:spAutoFit/>
-          </a:bodyPr>
-          <a:lstStyle/>
-          <a:p>
-            <a:pPr algn="l" indent="0" marL="0">
-              <a:lnSpc>
-                <a:spcPct val="94400"/>
-              </a:lnSpc>
-              <a:buNone/>
-            </a:pPr>
-            <a:r>
-              <a:rPr lang="en-US" sz="2000" b="1" dirty="0">
-                <a:solidFill>
-                  <a:srgbClr val="003A70"/>
-                </a:solidFill>
-                <a:latin typeface="Courier New" pitchFamily="34" charset="0"/>
-                <a:ea typeface="Courier New" pitchFamily="34" charset="-122"/>
-                <a:cs typeface="Courier New" pitchFamily="34" charset="-120"/>
-              </a:rPr>
-              <a:t>Π* s = s ⊓ (s · s)</a:t>
-            </a:r>
-            <a:endParaRPr lang="en-US" sz="2000" dirty="0"/>
-          </a:p>
-        </p:txBody>
-      </p:sp>
-      <p:sp>
-        <p:nvSpPr>
-          <p:cNvPr id="6" name="Text 3"/>
-          <p:cNvSpPr/>
-          <p:nvPr/>
-        </p:nvSpPr>
-        <p:spPr>
-          <a:xfrm>
-            <a:off x="607219" y="1599140"/>
-            <a:ext cx="7358063" cy="254775"/>
-          </a:xfrm>
-          <a:prstGeom prst="rect">
-            <a:avLst/>
-          </a:prstGeom>
-          <a:noFill/>
-          <a:ln/>
-        </p:spPr>
-        <p:txBody>
-          <a:bodyPr wrap="none" lIns="0" tIns="0" rIns="0" bIns="0" rtlCol="0" anchor="t">
-            <a:spAutoFit/>
-          </a:bodyPr>
-          <a:lstStyle/>
-          <a:p>
-            <a:pPr algn="l" indent="0" marL="0">
-              <a:lnSpc>
-                <a:spcPct val="98400"/>
-              </a:lnSpc>
-              <a:buNone/>
-            </a:pPr>
-            <a:r>
-              <a:rPr lang="en-US" sz="1550" dirty="0">
-                <a:solidFill>
-                  <a:srgbClr val="2F2F2F"/>
-                </a:solidFill>
-                <a:latin typeface="Calibri" pitchFamily="34" charset="0"/>
-                <a:ea typeface="Calibri" pitchFamily="34" charset="-122"/>
-                <a:cs typeface="Calibri" pitchFamily="34" charset="-120"/>
-              </a:rPr>
-              <a:t>The result is an </a:t>
-            </a:r>
-            <a:r>
-              <a:rPr lang="en-US" sz="1450" b="1" dirty="0">
-                <a:solidFill>
-                  <a:srgbClr val="003A70"/>
-                </a:solidFill>
-                <a:latin typeface="Calibri" pitchFamily="34" charset="0"/>
-                <a:ea typeface="Calibri" pitchFamily="34" charset="-122"/>
-                <a:cs typeface="Calibri" pitchFamily="34" charset="-120"/>
-              </a:rPr>
-              <a:t>idempotent element</a:t>
-            </a:r>
-            <a:r>
-              <a:rPr lang="en-US" sz="1550" dirty="0">
-                <a:solidFill>
-                  <a:srgbClr val="2F2F2F"/>
-                </a:solidFill>
-                <a:latin typeface="Calibri" pitchFamily="34" charset="0"/>
-                <a:ea typeface="Calibri" pitchFamily="34" charset="-122"/>
-                <a:cs typeface="Calibri" pitchFamily="34" charset="-120"/>
-              </a:rPr>
-              <a:t> that most precisely describes the loop body </a:t>
-            </a:r>
-            <a:r>
-              <a:rPr lang="en-US" sz="1450" b="1" dirty="0">
-                <a:solidFill>
-                  <a:srgbClr val="003A70"/>
-                </a:solidFill>
-                <a:latin typeface="Calibri" pitchFamily="34" charset="0"/>
-                <a:ea typeface="Calibri" pitchFamily="34" charset="-122"/>
-                <a:cs typeface="Calibri" pitchFamily="34" charset="-120"/>
-              </a:rPr>
-              <a:t>s</a:t>
-            </a:r>
-            <a:r>
-              <a:rPr lang="en-US" sz="1550" dirty="0">
-                <a:solidFill>
-                  <a:srgbClr val="2F2F2F"/>
-                </a:solidFill>
-                <a:latin typeface="Calibri" pitchFamily="34" charset="0"/>
-                <a:ea typeface="Calibri" pitchFamily="34" charset="-122"/>
-                <a:cs typeface="Calibri" pitchFamily="34" charset="-120"/>
-              </a:rPr>
-              <a:t>.</a:t>
-            </a:r>
-            <a:endParaRPr lang="en-US" sz="1550" dirty="0"/>
-          </a:p>
-        </p:txBody>
-      </p:sp>
-      <p:sp>
-        <p:nvSpPr>
-          <p:cNvPr id="7" name="Text 4"/>
-          <p:cNvSpPr/>
-          <p:nvPr/>
-        </p:nvSpPr>
-        <p:spPr>
-          <a:xfrm>
-            <a:off x="607219" y="1982502"/>
-            <a:ext cx="7886700" cy="153591"/>
-          </a:xfrm>
-          <a:prstGeom prst="rect">
-            <a:avLst/>
-          </a:prstGeom>
-          <a:noFill/>
-          <a:ln/>
-        </p:spPr>
-        <p:txBody>
-          <a:bodyPr wrap="square" lIns="0" tIns="0" rIns="0" bIns="0" rtlCol="0" anchor="t">
-            <a:spAutoFit/>
-          </a:bodyPr>
-          <a:lstStyle/>
-          <a:p>
-            <a:pPr algn="l" indent="0" marL="0">
-              <a:buNone/>
-            </a:pPr>
-            <a:r>
-              <a:rPr lang="en-US" sz="850" b="1" spc="1" kern="0" dirty="0">
-                <a:solidFill>
-                  <a:srgbClr val="00A3A1"/>
-                </a:solidFill>
-                <a:latin typeface="Calibri" pitchFamily="34" charset="0"/>
-                <a:ea typeface="Calibri" pitchFamily="34" charset="-122"/>
-                <a:cs typeface="Calibri" pitchFamily="34" charset="-120"/>
-              </a:rPr>
-              <a:t>SL2008 EXAMPLE: test2</a:t>
-            </a:r>
-            <a:endParaRPr lang="en-US" sz="850" dirty="0"/>
-          </a:p>
-        </p:txBody>
-      </p:sp>
-      <p:sp>
-        <p:nvSpPr>
-          <p:cNvPr id="8" name="Text 5"/>
-          <p:cNvSpPr/>
-          <p:nvPr/>
-        </p:nvSpPr>
-        <p:spPr>
-          <a:xfrm>
-            <a:off x="607219" y="2178955"/>
-            <a:ext cx="7886700" cy="219838"/>
-          </a:xfrm>
-          <a:prstGeom prst="rect">
-            <a:avLst/>
-          </a:prstGeom>
-          <a:noFill/>
-          <a:ln/>
-        </p:spPr>
-        <p:txBody>
-          <a:bodyPr wrap="none" lIns="0" tIns="0" rIns="0" bIns="0" rtlCol="0" anchor="t">
-            <a:spAutoFit/>
-          </a:bodyPr>
-          <a:lstStyle/>
-          <a:p>
-            <a:pPr algn="l" indent="0" marL="0">
-              <a:lnSpc>
-                <a:spcPct val="91200"/>
-              </a:lnSpc>
-              <a:buNone/>
-            </a:pPr>
-            <a:r>
-              <a:rPr lang="en-US" sz="1350" b="1" dirty="0">
-                <a:solidFill>
-                  <a:srgbClr val="003A70"/>
-                </a:solidFill>
-                <a:latin typeface="Courier New" pitchFamily="34" charset="0"/>
-                <a:ea typeface="Courier New" pitchFamily="34" charset="-122"/>
-                <a:cs typeface="Courier New" pitchFamily="34" charset="-120"/>
-              </a:rPr>
-              <a:t>: test2</a:t>
-            </a:r>
-            <a:endParaRPr lang="en-US" sz="1350" dirty="0"/>
-          </a:p>
-        </p:txBody>
-      </p:sp>
-      <p:sp>
-        <p:nvSpPr>
-          <p:cNvPr id="9" name="Text 6"/>
-          <p:cNvSpPr/>
-          <p:nvPr/>
-        </p:nvSpPr>
-        <p:spPr>
-          <a:xfrm>
-            <a:off x="607219" y="2413081"/>
-            <a:ext cx="7886700" cy="219838"/>
-          </a:xfrm>
-          <a:prstGeom prst="rect">
-            <a:avLst/>
-          </a:prstGeom>
-          <a:noFill/>
-          <a:ln/>
-        </p:spPr>
-        <p:txBody>
-          <a:bodyPr wrap="none" lIns="340233" tIns="0" rIns="0" bIns="0" rtlCol="0" anchor="t">
-            <a:spAutoFit/>
-          </a:bodyPr>
-          <a:lstStyle/>
-          <a:p>
-            <a:pPr algn="l" indent="0" marL="0">
-              <a:lnSpc>
-                <a:spcPct val="91200"/>
-              </a:lnSpc>
-              <a:buNone/>
-            </a:pPr>
-            <a:r>
-              <a:rPr lang="en-US" sz="1350" b="1" dirty="0">
-                <a:solidFill>
-                  <a:srgbClr val="003A70"/>
-                </a:solidFill>
-                <a:latin typeface="Courier New" pitchFamily="34" charset="0"/>
-                <a:ea typeface="Courier New" pitchFamily="34" charset="-122"/>
-                <a:cs typeface="Courier New" pitchFamily="34" charset="-120"/>
-              </a:rPr>
-              <a:t>BEGIN</a:t>
-            </a:r>
-            <a:endParaRPr lang="en-US" sz="1350" dirty="0"/>
-          </a:p>
-        </p:txBody>
-      </p:sp>
-      <p:sp>
-        <p:nvSpPr>
-          <p:cNvPr id="10" name="Text 7"/>
-          <p:cNvSpPr/>
-          <p:nvPr/>
-        </p:nvSpPr>
-        <p:spPr>
-          <a:xfrm>
-            <a:off x="607219" y="2647206"/>
-            <a:ext cx="7886700" cy="219838"/>
-          </a:xfrm>
-          <a:prstGeom prst="rect">
-            <a:avLst/>
-          </a:prstGeom>
-          <a:noFill/>
-          <a:ln/>
-        </p:spPr>
-        <p:txBody>
-          <a:bodyPr wrap="none" lIns="340233" tIns="0" rIns="0" bIns="0" rtlCol="0" anchor="t">
-            <a:spAutoFit/>
-          </a:bodyPr>
-          <a:lstStyle/>
-          <a:p>
-            <a:pPr algn="l" indent="0" marL="0">
-              <a:lnSpc>
-                <a:spcPct val="91200"/>
-              </a:lnSpc>
-              <a:buNone/>
-            </a:pPr>
-            <a:r>
-              <a:rPr lang="en-US" sz="1350" b="1" dirty="0">
-                <a:solidFill>
-                  <a:srgbClr val="003A70"/>
-                </a:solidFill>
-                <a:latin typeface="Courier New" pitchFamily="34" charset="0"/>
-                <a:ea typeface="Courier New" pitchFamily="34" charset="-122"/>
-                <a:cs typeface="Courier New" pitchFamily="34" charset="-120"/>
-              </a:rPr>
-              <a:t>SWAP OVER</a:t>
-            </a:r>
-            <a:endParaRPr lang="en-US" sz="1350" dirty="0"/>
-          </a:p>
-        </p:txBody>
-      </p:sp>
-      <p:sp>
-        <p:nvSpPr>
-          <p:cNvPr id="11" name="Text 8"/>
-          <p:cNvSpPr/>
-          <p:nvPr/>
-        </p:nvSpPr>
-        <p:spPr>
-          <a:xfrm>
-            <a:off x="607219" y="2881331"/>
-            <a:ext cx="7886700" cy="219838"/>
-          </a:xfrm>
-          <a:prstGeom prst="rect">
-            <a:avLst/>
-          </a:prstGeom>
-          <a:noFill/>
-          <a:ln/>
-        </p:spPr>
-        <p:txBody>
-          <a:bodyPr wrap="none" lIns="340233" tIns="0" rIns="0" bIns="0" rtlCol="0" anchor="t">
-            <a:spAutoFit/>
-          </a:bodyPr>
-          <a:lstStyle/>
-          <a:p>
-            <a:pPr algn="l" indent="0" marL="0">
-              <a:lnSpc>
-                <a:spcPct val="91200"/>
-              </a:lnSpc>
-              <a:buNone/>
-            </a:pPr>
-            <a:r>
-              <a:rPr lang="en-US" sz="1350" b="1" dirty="0">
-                <a:solidFill>
-                  <a:srgbClr val="003A70"/>
-                </a:solidFill>
-                <a:latin typeface="Courier New" pitchFamily="34" charset="0"/>
-                <a:ea typeface="Courier New" pitchFamily="34" charset="-122"/>
-                <a:cs typeface="Courier New" pitchFamily="34" charset="-120"/>
-              </a:rPr>
-              <a:t>WHILE</a:t>
-            </a:r>
-            <a:endParaRPr lang="en-US" sz="1350" dirty="0"/>
-          </a:p>
-        </p:txBody>
-      </p:sp>
-      <p:sp>
-        <p:nvSpPr>
-          <p:cNvPr id="12" name="Text 9"/>
-          <p:cNvSpPr/>
-          <p:nvPr/>
-        </p:nvSpPr>
-        <p:spPr>
-          <a:xfrm>
-            <a:off x="607219" y="3115456"/>
-            <a:ext cx="7886700" cy="219838"/>
-          </a:xfrm>
-          <a:prstGeom prst="rect">
-            <a:avLst/>
-          </a:prstGeom>
-          <a:noFill/>
-          <a:ln/>
-        </p:spPr>
-        <p:txBody>
-          <a:bodyPr wrap="none" lIns="340233" tIns="0" rIns="0" bIns="0" rtlCol="0" anchor="t">
-            <a:spAutoFit/>
-          </a:bodyPr>
-          <a:lstStyle/>
-          <a:p>
-            <a:pPr algn="l" indent="0" marL="0">
-              <a:lnSpc>
-                <a:spcPct val="91200"/>
-              </a:lnSpc>
-              <a:buNone/>
-            </a:pPr>
-            <a:r>
-              <a:rPr lang="en-US" sz="1350" b="1" dirty="0">
-                <a:solidFill>
-                  <a:srgbClr val="003A70"/>
-                </a:solidFill>
-                <a:latin typeface="Courier New" pitchFamily="34" charset="0"/>
-                <a:ea typeface="Courier New" pitchFamily="34" charset="-122"/>
-                <a:cs typeface="Courier New" pitchFamily="34" charset="-120"/>
-              </a:rPr>
-              <a:t>NOT</a:t>
-            </a:r>
-            <a:endParaRPr lang="en-US" sz="1350" dirty="0"/>
-          </a:p>
-        </p:txBody>
-      </p:sp>
-      <p:sp>
-        <p:nvSpPr>
-          <p:cNvPr id="13" name="Text 10"/>
-          <p:cNvSpPr/>
-          <p:nvPr/>
-        </p:nvSpPr>
-        <p:spPr>
-          <a:xfrm>
-            <a:off x="607219" y="3349582"/>
-            <a:ext cx="7886700" cy="219838"/>
-          </a:xfrm>
-          <a:prstGeom prst="rect">
-            <a:avLst/>
-          </a:prstGeom>
-          <a:noFill/>
-          <a:ln/>
-        </p:spPr>
-        <p:txBody>
-          <a:bodyPr wrap="none" lIns="340233" tIns="0" rIns="0" bIns="0" rtlCol="0" anchor="t">
-            <a:spAutoFit/>
-          </a:bodyPr>
-          <a:lstStyle/>
-          <a:p>
-            <a:pPr algn="l" indent="0" marL="0">
-              <a:lnSpc>
-                <a:spcPct val="91200"/>
-              </a:lnSpc>
-              <a:buNone/>
-            </a:pPr>
-            <a:r>
-              <a:rPr lang="en-US" sz="1350" b="1" dirty="0">
-                <a:solidFill>
-                  <a:srgbClr val="003A70"/>
-                </a:solidFill>
-                <a:latin typeface="Courier New" pitchFamily="34" charset="0"/>
-                <a:ea typeface="Courier New" pitchFamily="34" charset="-122"/>
-                <a:cs typeface="Courier New" pitchFamily="34" charset="-120"/>
-              </a:rPr>
-              <a:t>REPEAT ;</a:t>
-            </a:r>
-            <a:endParaRPr lang="en-US" sz="1350" dirty="0"/>
-          </a:p>
-        </p:txBody>
-      </p:sp>
-      <p:sp>
-        <p:nvSpPr>
-          <p:cNvPr id="14" name="Text 11"/>
-          <p:cNvSpPr/>
-          <p:nvPr/>
-        </p:nvSpPr>
-        <p:spPr>
-          <a:xfrm>
-            <a:off x="607219" y="3640857"/>
-            <a:ext cx="7886700" cy="232172"/>
-          </a:xfrm>
-          <a:prstGeom prst="rect">
-            <a:avLst/>
-          </a:prstGeom>
-          <a:noFill/>
-          <a:ln/>
-        </p:spPr>
-        <p:txBody>
-          <a:bodyPr wrap="square" lIns="0" tIns="0" rIns="0" bIns="0" rtlCol="0" anchor="t">
-            <a:spAutoFit/>
-          </a:bodyPr>
-          <a:lstStyle/>
-          <a:p>
-            <a:pPr algn="l" indent="0" marL="0">
-              <a:buNone/>
-            </a:pPr>
-            <a:r>
-              <a:rPr lang="en-US" sz="1450" b="1" dirty="0">
-                <a:solidFill>
-                  <a:srgbClr val="003A70"/>
-                </a:solidFill>
-                <a:latin typeface="Courier New" pitchFamily="34" charset="0"/>
-                <a:ea typeface="Courier New" pitchFamily="34" charset="-122"/>
-                <a:cs typeface="Courier New" pitchFamily="34" charset="-120"/>
-              </a:rPr>
-              <a:t>(flag[1] flag[1] -- flag[1] flag[1])</a:t>
-            </a:r>
-            <a:endParaRPr lang="en-US" sz="1450" dirty="0"/>
-          </a:p>
-        </p:txBody>
-      </p:sp>
-      <p:sp>
-        <p:nvSpPr>
-          <p:cNvPr id="15" name="Text 12"/>
-          <p:cNvSpPr/>
-          <p:nvPr/>
-        </p:nvSpPr>
-        <p:spPr>
-          <a:xfrm>
-            <a:off x="8378056" y="4997053"/>
-            <a:ext cx="115863" cy="139303"/>
-          </a:xfrm>
-          <a:prstGeom prst="rect">
-            <a:avLst/>
-          </a:prstGeom>
-          <a:noFill/>
-          <a:ln/>
-        </p:spPr>
-        <p:txBody>
-          <a:bodyPr wrap="none" lIns="0" tIns="0" rIns="0" bIns="0" rtlCol="0" anchor="t">
-            <a:spAutoFit/>
-          </a:bodyPr>
-          <a:lstStyle/>
-          <a:p>
-            <a:pPr algn="l" indent="0" marL="0">
-              <a:buNone/>
-            </a:pPr>
-            <a:r>
-              <a:rPr lang="en-US" sz="850" dirty="0">
-                <a:solidFill>
-                  <a:srgbClr val="888888"/>
-                </a:solidFill>
-                <a:latin typeface="Calibri" pitchFamily="34" charset="0"/>
-                <a:ea typeface="Calibri" pitchFamily="34" charset="-122"/>
-                <a:cs typeface="Calibri" pitchFamily="34" charset="-120"/>
-              </a:rPr>
-              <a:t>10</a:t>
-            </a:r>
-            <a:endParaRPr lang="en-US" sz="850" dirty="0"/>
-          </a:p>
-        </p:txBody>
-      </p:sp>
-    </p:spTree>
-  </p:cSld>
-  <p:clrMapOvr>
-    <a:masterClrMapping/>
-  </p:clrMapOvr>
-</p:sld>
-</file>
-
-<file path=ppt/slides/slide11.xml><?xml version="1.0" encoding="utf-8"?>
 <p:sld xmlns:a="http://schemas.openxmlformats.org/drawingml/2006/main" xmlns:r="http://schemas.openxmlformats.org/officeDocument/2006/relationships" xmlns:p="http://schemas.openxmlformats.org/presentationml/2006/main">
   <p:cSld name="Slide 11">
     <p:spTree>
@@ -2729,14 +1685,14 @@
       </p:grpSpPr>
       <p:pic>
         <p:nvPicPr>
-          <p:cNvPr id="2" name="Image 0" descr="preencoded.png">    </p:cNvPr>
+          <p:cNvPr id="2" name="Image 0" descr="preencoded.png"/>
           <p:cNvPicPr>
             <a:picLocks noChangeAspect="1"/>
           </p:cNvPicPr>
           <p:nvPr/>
         </p:nvPicPr>
         <p:blipFill>
-          <a:blip r:embed="rId1"/>
+          <a:blip r:embed="rId3"/>
           <a:stretch>
             <a:fillRect/>
           </a:stretch>
@@ -2760,21 +1716,21 @@
         <p:spPr>
           <a:xfrm>
             <a:off x="607219" y="350044"/>
-            <a:ext cx="7886700" cy="375047"/>
-          </a:xfrm>
-          <a:prstGeom prst="rect">
-            <a:avLst/>
-          </a:prstGeom>
-          <a:noFill/>
-          <a:ln/>
-        </p:spPr>
-        <p:txBody>
-          <a:bodyPr wrap="none" lIns="0" tIns="0" rIns="0" bIns="0" rtlCol="0" anchor="t">
-            <a:spAutoFit/>
-          </a:bodyPr>
-          <a:lstStyle/>
-          <a:p>
-            <a:pPr algn="l" indent="0" marL="0">
+            <a:ext cx="3972370" cy="353174"/>
+          </a:xfrm>
+          <a:prstGeom prst="rect">
+            <a:avLst/>
+          </a:prstGeom>
+          <a:noFill/>
+          <a:ln/>
+        </p:spPr>
+        <p:txBody>
+          <a:bodyPr wrap="none" lIns="0" tIns="0" rIns="0" bIns="0" rtlCol="0" anchor="t">
+            <a:spAutoFit/>
+          </a:bodyPr>
+          <a:lstStyle/>
+          <a:p>
+            <a:pPr marL="0" indent="0" algn="l">
               <a:lnSpc>
                 <a:spcPct val="84000"/>
               </a:lnSpc>
@@ -2789,7 +1745,51 @@
                 <a:ea typeface="Calibri Light" pitchFamily="34" charset="-122"/>
                 <a:cs typeface="Calibri Light" pitchFamily="34" charset="-120"/>
               </a:rPr>
-              <a:t>The native evaluator realizes the calculus</a:t>
+              <a:t>The native</a:t>
+            </a:r>
+            <a:r>
+              <a:rPr lang="et-EE" sz="2700" dirty="0">
+                <a:solidFill>
+                  <a:srgbClr val="003A70"/>
+                </a:solidFill>
+                <a:latin typeface="Calibri Light" pitchFamily="34" charset="0"/>
+                <a:ea typeface="Calibri Light" pitchFamily="34" charset="-122"/>
+                <a:cs typeface="Calibri Light" pitchFamily="34" charset="-120"/>
+              </a:rPr>
+              <a:t> (</a:t>
+            </a:r>
+            <a:r>
+              <a:rPr lang="et-EE" sz="2700" dirty="0" err="1">
+                <a:solidFill>
+                  <a:srgbClr val="003A70"/>
+                </a:solidFill>
+                <a:latin typeface="Calibri Light" pitchFamily="34" charset="0"/>
+                <a:ea typeface="Calibri Light" pitchFamily="34" charset="-122"/>
+                <a:cs typeface="Calibri Light" pitchFamily="34" charset="-120"/>
+              </a:rPr>
+              <a:t>gforth</a:t>
+            </a:r>
+            <a:r>
+              <a:rPr lang="et-EE" sz="2700">
+                <a:solidFill>
+                  <a:srgbClr val="003A70"/>
+                </a:solidFill>
+                <a:latin typeface="Calibri Light" pitchFamily="34" charset="0"/>
+                <a:ea typeface="Calibri Light" pitchFamily="34" charset="-122"/>
+                <a:cs typeface="Calibri Light" pitchFamily="34" charset="-120"/>
+              </a:rPr>
+              <a:t>)</a:t>
+            </a:r>
+            <a:r>
+              <a:rPr lang="en-US" sz="2700">
+                <a:solidFill>
+                  <a:srgbClr val="003A70"/>
+                </a:solidFill>
+                <a:latin typeface="Calibri Light" pitchFamily="34" charset="0"/>
+                <a:ea typeface="Calibri Light" pitchFamily="34" charset="-122"/>
+                <a:cs typeface="Calibri Light" pitchFamily="34" charset="-120"/>
+              </a:rPr>
+              <a:t> evaluator</a:t>
             </a:r>
             <a:endParaRPr lang="en-US" sz="2700" dirty="0"/>
           </a:p>
@@ -2818,11 +1818,11 @@
           </a:bodyPr>
           <a:lstStyle/>
           <a:p>
-            <a:pPr algn="l" indent="0" marL="0">
-              <a:buNone/>
-            </a:pPr>
-            <a:r>
-              <a:rPr lang="en-US" sz="1100" b="1" spc="1" kern="0" dirty="0">
+            <a:pPr marL="0" indent="0" algn="l">
+              <a:buNone/>
+            </a:pPr>
+            <a:r>
+              <a:rPr lang="en-US" sz="1100" b="1" kern="0" spc="1" dirty="0">
                 <a:solidFill>
                   <a:srgbClr val="00A3A1"/>
                 </a:solidFill>
@@ -2859,7 +1859,7 @@
           </a:bodyPr>
           <a:lstStyle/>
           <a:p>
-            <a:pPr algn="l" indent="0" marL="0">
+            <a:pPr marL="0" indent="0" algn="l">
               <a:lnSpc>
                 <a:spcPct val="100000"/>
               </a:lnSpc>
@@ -2903,11 +1903,11 @@
           </a:bodyPr>
           <a:lstStyle/>
           <a:p>
-            <a:pPr algn="l" indent="0" marL="0">
-              <a:buNone/>
-            </a:pPr>
-            <a:r>
-              <a:rPr lang="en-US" sz="1100" b="1" spc="1" kern="0" dirty="0">
+            <a:pPr marL="0" indent="0" algn="l">
+              <a:buNone/>
+            </a:pPr>
+            <a:r>
+              <a:rPr lang="en-US" sz="1100" b="1" kern="0" spc="1" dirty="0">
                 <a:solidFill>
                   <a:srgbClr val="00A3A1"/>
                 </a:solidFill>
@@ -2944,7 +1944,7 @@
           </a:bodyPr>
           <a:lstStyle/>
           <a:p>
-            <a:pPr algn="l" indent="0" marL="0">
+            <a:pPr marL="0" indent="0" algn="l">
               <a:lnSpc>
                 <a:spcPct val="100000"/>
               </a:lnSpc>
@@ -2988,11 +1988,11 @@
           </a:bodyPr>
           <a:lstStyle/>
           <a:p>
-            <a:pPr algn="l" indent="0" marL="0">
-              <a:buNone/>
-            </a:pPr>
-            <a:r>
-              <a:rPr lang="en-US" sz="1100" b="1" spc="1" kern="0" dirty="0">
+            <a:pPr marL="0" indent="0" algn="l">
+              <a:buNone/>
+            </a:pPr>
+            <a:r>
+              <a:rPr lang="en-US" sz="1100" b="1" kern="0" spc="1" dirty="0">
                 <a:solidFill>
                   <a:srgbClr val="00A3A1"/>
                 </a:solidFill>
@@ -3029,7 +2029,7 @@
           </a:bodyPr>
           <a:lstStyle/>
           <a:p>
-            <a:pPr algn="l" indent="0" marL="0">
+            <a:pPr marL="0" indent="0" algn="l">
               <a:lnSpc>
                 <a:spcPct val="100000"/>
               </a:lnSpc>
@@ -3073,7 +2073,7 @@
           </a:bodyPr>
           <a:lstStyle/>
           <a:p>
-            <a:pPr algn="l" indent="0" marL="0">
+            <a:pPr marL="0" indent="0" algn="l">
               <a:lnSpc>
                 <a:spcPct val="100000"/>
               </a:lnSpc>
@@ -3117,7 +2117,7 @@
           </a:bodyPr>
           <a:lstStyle/>
           <a:p>
-            <a:pPr algn="l" indent="0" marL="0">
+            <a:pPr marL="0" indent="0" algn="l">
               <a:lnSpc>
                 <a:spcPct val="100000"/>
               </a:lnSpc>
@@ -3161,7 +2161,7 @@
           </a:bodyPr>
           <a:lstStyle/>
           <a:p>
-            <a:pPr algn="l" indent="0" marL="0">
+            <a:pPr marL="0" indent="0" algn="l">
               <a:lnSpc>
                 <a:spcPct val="100000"/>
               </a:lnSpc>
@@ -3205,7 +2205,7 @@
           </a:bodyPr>
           <a:lstStyle/>
           <a:p>
-            <a:pPr algn="l" indent="0" marL="0">
+            <a:pPr marL="0" indent="0" algn="l">
               <a:lnSpc>
                 <a:spcPct val="100000"/>
               </a:lnSpc>
@@ -3249,7 +2249,7 @@
           </a:bodyPr>
           <a:lstStyle/>
           <a:p>
-            <a:pPr algn="l" indent="0" marL="0">
+            <a:pPr marL="0" indent="0" algn="l">
               <a:lnSpc>
                 <a:spcPct val="100000"/>
               </a:lnSpc>
@@ -3293,11 +2293,11 @@
           </a:bodyPr>
           <a:lstStyle/>
           <a:p>
-            <a:pPr algn="l" indent="0" marL="0">
-              <a:buNone/>
-            </a:pPr>
-            <a:r>
-              <a:rPr lang="en-US" sz="1100" b="1" spc="1" kern="0" dirty="0">
+            <a:pPr marL="0" indent="0" algn="l">
+              <a:buNone/>
+            </a:pPr>
+            <a:r>
+              <a:rPr lang="en-US" sz="1100" b="1" kern="0" spc="1" dirty="0">
                 <a:solidFill>
                   <a:srgbClr val="00A3A1"/>
                 </a:solidFill>
@@ -3334,7 +2334,7 @@
           </a:bodyPr>
           <a:lstStyle/>
           <a:p>
-            <a:pPr algn="l" indent="0" marL="0">
+            <a:pPr marL="0" indent="0" algn="l">
               <a:lnSpc>
                 <a:spcPct val="100000"/>
               </a:lnSpc>
@@ -3378,7 +2378,7 @@
           </a:bodyPr>
           <a:lstStyle/>
           <a:p>
-            <a:pPr algn="l" indent="0" marL="0">
+            <a:pPr marL="0" indent="0" algn="l">
               <a:buNone/>
             </a:pPr>
             <a:r>
@@ -3419,7 +2419,7 @@
           </a:bodyPr>
           <a:lstStyle/>
           <a:p>
-            <a:pPr algn="l" indent="0" marL="0">
+            <a:pPr marL="0" indent="0" algn="l">
               <a:buNone/>
             </a:pPr>
             <a:r>
@@ -3460,7 +2460,7 @@
           </a:bodyPr>
           <a:lstStyle/>
           <a:p>
-            <a:pPr algn="l" indent="0" marL="0">
+            <a:pPr marL="0" indent="0" algn="l">
               <a:buNone/>
             </a:pPr>
             <a:r>
@@ -3486,7 +2486,7 @@
 </p:sld>
 </file>
 
-<file path=ppt/slides/slide12.xml><?xml version="1.0" encoding="utf-8"?>
+<file path=ppt/slides/slide11.xml><?xml version="1.0" encoding="utf-8"?>
 <p:sld xmlns:a="http://schemas.openxmlformats.org/drawingml/2006/main" xmlns:r="http://schemas.openxmlformats.org/officeDocument/2006/relationships" xmlns:p="http://schemas.openxmlformats.org/presentationml/2006/main">
   <p:cSld name="Slide 12">
     <p:spTree>
@@ -3505,14 +2505,14 @@
       </p:grpSpPr>
       <p:pic>
         <p:nvPicPr>
-          <p:cNvPr id="2" name="Image 0" descr="preencoded.png">    </p:cNvPr>
+          <p:cNvPr id="2" name="Image 0" descr="preencoded.png"/>
           <p:cNvPicPr>
             <a:picLocks noChangeAspect="1"/>
           </p:cNvPicPr>
           <p:nvPr/>
         </p:nvPicPr>
         <p:blipFill>
-          <a:blip r:embed="rId1"/>
+          <a:blip r:embed="rId3"/>
           <a:stretch>
             <a:fillRect/>
           </a:stretch>
@@ -3550,14 +2550,14 @@
           </a:bodyPr>
           <a:lstStyle/>
           <a:p>
-            <a:pPr algn="l" indent="0" marL="0">
+            <a:pPr marL="0" indent="0" algn="l">
               <a:lnSpc>
                 <a:spcPct val="83200"/>
               </a:lnSpc>
               <a:buNone/>
             </a:pPr>
             <a:r>
-              <a:rPr lang="en-US" sz="3050" spc="-1" kern="0" dirty="0">
+              <a:rPr lang="en-US" sz="3050" kern="0" spc="-1" dirty="0">
                 <a:solidFill>
                   <a:srgbClr val="003A70"/>
                 </a:solidFill>
@@ -3594,11 +2594,11 @@
           </a:bodyPr>
           <a:lstStyle/>
           <a:p>
-            <a:pPr algn="l" indent="0" marL="0">
-              <a:buNone/>
-            </a:pPr>
-            <a:r>
-              <a:rPr lang="en-US" sz="1600" b="1" spc="1" kern="0" dirty="0">
+            <a:pPr marL="0" indent="0" algn="l">
+              <a:buNone/>
+            </a:pPr>
+            <a:r>
+              <a:rPr lang="en-US" sz="1600" b="1" kern="0" spc="1" dirty="0">
                 <a:solidFill>
                   <a:srgbClr val="00A3A1"/>
                 </a:solidFill>
@@ -3635,7 +2635,7 @@
           </a:bodyPr>
           <a:lstStyle/>
           <a:p>
-            <a:pPr algn="l" indent="0" marL="0">
+            <a:pPr marL="0" indent="0" algn="l">
               <a:lnSpc>
                 <a:spcPct val="104000"/>
               </a:lnSpc>
@@ -3679,11 +2679,11 @@
           </a:bodyPr>
           <a:lstStyle/>
           <a:p>
-            <a:pPr algn="l" indent="0" marL="0">
-              <a:buNone/>
-            </a:pPr>
-            <a:r>
-              <a:rPr lang="en-US" sz="1600" b="1" spc="1" kern="0" dirty="0">
+            <a:pPr marL="0" indent="0" algn="l">
+              <a:buNone/>
+            </a:pPr>
+            <a:r>
+              <a:rPr lang="en-US" sz="1600" b="1" kern="0" spc="1" dirty="0">
                 <a:solidFill>
                   <a:srgbClr val="00A3A1"/>
                 </a:solidFill>
@@ -3720,7 +2720,7 @@
           </a:bodyPr>
           <a:lstStyle/>
           <a:p>
-            <a:pPr algn="l" indent="0" marL="0">
+            <a:pPr marL="0" indent="0" algn="l">
               <a:lnSpc>
                 <a:spcPct val="104000"/>
               </a:lnSpc>
@@ -3764,11 +2764,11 @@
           </a:bodyPr>
           <a:lstStyle/>
           <a:p>
-            <a:pPr algn="l" indent="0" marL="0">
-              <a:buNone/>
-            </a:pPr>
-            <a:r>
-              <a:rPr lang="en-US" sz="1600" b="1" spc="1" kern="0" dirty="0">
+            <a:pPr marL="0" indent="0" algn="l">
+              <a:buNone/>
+            </a:pPr>
+            <a:r>
+              <a:rPr lang="en-US" sz="1600" b="1" kern="0" spc="1" dirty="0">
                 <a:solidFill>
                   <a:srgbClr val="00A3A1"/>
                 </a:solidFill>
@@ -3805,7 +2805,7 @@
           </a:bodyPr>
           <a:lstStyle/>
           <a:p>
-            <a:pPr algn="l" indent="0" marL="0">
+            <a:pPr marL="0" indent="0" algn="l">
               <a:lnSpc>
                 <a:spcPct val="104000"/>
               </a:lnSpc>
@@ -3849,7 +2849,7 @@
           </a:bodyPr>
           <a:lstStyle/>
           <a:p>
-            <a:pPr algn="l" indent="0" marL="0">
+            <a:pPr marL="0" indent="0" algn="l">
               <a:lnSpc>
                 <a:spcPct val="104000"/>
               </a:lnSpc>
@@ -3893,7 +2893,7 @@
           </a:bodyPr>
           <a:lstStyle/>
           <a:p>
-            <a:pPr algn="l" indent="0" marL="0">
+            <a:pPr marL="0" indent="0" algn="l">
               <a:lnSpc>
                 <a:spcPct val="104000"/>
               </a:lnSpc>
@@ -3937,11 +2937,11 @@
           </a:bodyPr>
           <a:lstStyle/>
           <a:p>
-            <a:pPr algn="l" indent="0" marL="0">
-              <a:buNone/>
-            </a:pPr>
-            <a:r>
-              <a:rPr lang="en-US" sz="1600" b="1" spc="1" kern="0" dirty="0">
+            <a:pPr marL="0" indent="0" algn="l">
+              <a:buNone/>
+            </a:pPr>
+            <a:r>
+              <a:rPr lang="en-US" sz="1600" b="1" kern="0" spc="1" dirty="0">
                 <a:solidFill>
                   <a:srgbClr val="00A3A1"/>
                 </a:solidFill>
@@ -3978,7 +2978,7 @@
           </a:bodyPr>
           <a:lstStyle/>
           <a:p>
-            <a:pPr algn="l" indent="0" marL="0">
+            <a:pPr marL="0" indent="0" algn="l">
               <a:lnSpc>
                 <a:spcPct val="104000"/>
               </a:lnSpc>
@@ -4022,7 +3022,7 @@
           </a:bodyPr>
           <a:lstStyle/>
           <a:p>
-            <a:pPr algn="l" indent="0" marL="0">
+            <a:pPr marL="0" indent="0" algn="l">
               <a:buNone/>
             </a:pPr>
             <a:r>
@@ -4067,14 +3067,14 @@
       </p:grpSpPr>
       <p:pic>
         <p:nvPicPr>
-          <p:cNvPr id="2" name="Image 0" descr="preencoded.png">    </p:cNvPr>
+          <p:cNvPr id="2" name="Image 0" descr="preencoded.png"/>
           <p:cNvPicPr>
             <a:picLocks noChangeAspect="1"/>
           </p:cNvPicPr>
           <p:nvPr/>
         </p:nvPicPr>
         <p:blipFill>
-          <a:blip r:embed="rId1"/>
+          <a:blip r:embed="rId3"/>
           <a:stretch>
             <a:fillRect/>
           </a:stretch>
@@ -4097,7 +3097,7 @@
         </p:nvSpPr>
         <p:spPr>
           <a:xfrm>
-            <a:off x="607219" y="364331"/>
+            <a:off x="607219" y="350044"/>
             <a:ext cx="7886700" cy="416012"/>
           </a:xfrm>
           <a:prstGeom prst="rect">
@@ -4112,14 +3112,14 @@
           </a:bodyPr>
           <a:lstStyle/>
           <a:p>
-            <a:pPr algn="l" indent="0" marL="0">
+            <a:pPr marL="0" indent="0" algn="l">
               <a:lnSpc>
                 <a:spcPct val="83200"/>
               </a:lnSpc>
               <a:buNone/>
             </a:pPr>
             <a:r>
-              <a:rPr lang="en-US" sz="3050" spc="-1" kern="0" dirty="0">
+              <a:rPr lang="en-US" sz="3050" dirty="0">
                 <a:solidFill>
                   <a:srgbClr val="003A70"/>
                 </a:solidFill>
@@ -4127,7 +3127,7 @@
                 <a:ea typeface="Calibri Light" pitchFamily="34" charset="-122"/>
                 <a:cs typeface="Calibri Light" pitchFamily="34" charset="-120"/>
               </a:rPr>
-              <a:t>Why static checking?</a:t>
+              <a:t>Why Static Type Checking?</a:t>
             </a:r>
             <a:endParaRPr lang="en-US" sz="3050" dirty="0"/>
           </a:p>
@@ -4141,29 +3141,29 @@
         </p:nvSpPr>
         <p:spPr>
           <a:xfrm>
-            <a:off x="607219" y="1244687"/>
-            <a:ext cx="7886700" cy="291443"/>
-          </a:xfrm>
-          <a:prstGeom prst="rect">
-            <a:avLst/>
-          </a:prstGeom>
-          <a:noFill/>
-          <a:ln/>
-        </p:spPr>
-        <p:txBody>
-          <a:bodyPr wrap="none" lIns="0" tIns="0" rIns="0" bIns="0" rtlCol="0" anchor="t">
-            <a:spAutoFit/>
-          </a:bodyPr>
-          <a:lstStyle/>
-          <a:p>
-            <a:pPr algn="l" indent="0" marL="0">
-              <a:lnSpc>
-                <a:spcPct val="96000"/>
-              </a:lnSpc>
-              <a:buNone/>
-            </a:pPr>
-            <a:r>
-              <a:rPr lang="en-US" sz="1800" dirty="0">
+            <a:off x="607219" y="1301837"/>
+            <a:ext cx="7886700" cy="307516"/>
+          </a:xfrm>
+          <a:prstGeom prst="rect">
+            <a:avLst/>
+          </a:prstGeom>
+          <a:noFill/>
+          <a:ln/>
+        </p:spPr>
+        <p:txBody>
+          <a:bodyPr wrap="none" lIns="0" tIns="0" rIns="0" bIns="0" rtlCol="0" anchor="t">
+            <a:spAutoFit/>
+          </a:bodyPr>
+          <a:lstStyle/>
+          <a:p>
+            <a:pPr marL="0" indent="0" algn="l">
+              <a:lnSpc>
+                <a:spcPct val="98400"/>
+              </a:lnSpc>
+              <a:buNone/>
+            </a:pPr>
+            <a:r>
+              <a:rPr lang="en-US" sz="1850" dirty="0">
                 <a:solidFill>
                   <a:srgbClr val="2F2F2F"/>
                 </a:solidFill>
@@ -4171,9 +3171,9 @@
                 <a:ea typeface="Calibri" pitchFamily="34" charset="-122"/>
                 <a:cs typeface="Calibri" pitchFamily="34" charset="-120"/>
               </a:rPr>
-              <a:t>Detect stack-shape errors before execution.</a:t>
-            </a:r>
-            <a:endParaRPr lang="en-US" sz="1800" dirty="0"/>
+              <a:t>Detect stack errors before execution.</a:t>
+            </a:r>
+            <a:endParaRPr lang="en-US" sz="1850" dirty="0"/>
           </a:p>
         </p:txBody>
       </p:sp>
@@ -4185,29 +3185,29 @@
         </p:nvSpPr>
         <p:spPr>
           <a:xfrm>
-            <a:off x="607219" y="1757586"/>
-            <a:ext cx="7886700" cy="291443"/>
-          </a:xfrm>
-          <a:prstGeom prst="rect">
-            <a:avLst/>
-          </a:prstGeom>
-          <a:noFill/>
-          <a:ln/>
-        </p:spPr>
-        <p:txBody>
-          <a:bodyPr wrap="none" lIns="0" tIns="0" rIns="0" bIns="0" rtlCol="0" anchor="t">
-            <a:spAutoFit/>
-          </a:bodyPr>
-          <a:lstStyle/>
-          <a:p>
-            <a:pPr algn="l" indent="0" marL="0">
-              <a:lnSpc>
-                <a:spcPct val="96000"/>
-              </a:lnSpc>
-              <a:buNone/>
-            </a:pPr>
-            <a:r>
-              <a:rPr lang="en-US" sz="1800" dirty="0">
+            <a:off x="607219" y="1823665"/>
+            <a:ext cx="7886700" cy="307516"/>
+          </a:xfrm>
+          <a:prstGeom prst="rect">
+            <a:avLst/>
+          </a:prstGeom>
+          <a:noFill/>
+          <a:ln/>
+        </p:spPr>
+        <p:txBody>
+          <a:bodyPr wrap="none" lIns="0" tIns="0" rIns="0" bIns="0" rtlCol="0" anchor="t">
+            <a:spAutoFit/>
+          </a:bodyPr>
+          <a:lstStyle/>
+          <a:p>
+            <a:pPr marL="0" indent="0" algn="l">
+              <a:lnSpc>
+                <a:spcPct val="98400"/>
+              </a:lnSpc>
+              <a:buNone/>
+            </a:pPr>
+            <a:r>
+              <a:rPr lang="en-US" sz="1850" dirty="0">
                 <a:solidFill>
                   <a:srgbClr val="2F2F2F"/>
                 </a:solidFill>
@@ -4215,9 +3215,9 @@
                 <a:ea typeface="Calibri" pitchFamily="34" charset="-122"/>
                 <a:cs typeface="Calibri" pitchFamily="34" charset="-120"/>
               </a:rPr>
-              <a:t>Detect type mismatches at word boundaries.</a:t>
-            </a:r>
-            <a:endParaRPr lang="en-US" sz="1800" dirty="0"/>
+              <a:t>Detect type mismatches early.</a:t>
+            </a:r>
+            <a:endParaRPr lang="en-US" sz="1850" dirty="0"/>
           </a:p>
         </p:txBody>
       </p:sp>
@@ -4229,29 +3229,29 @@
         </p:nvSpPr>
         <p:spPr>
           <a:xfrm>
-            <a:off x="607219" y="2270485"/>
-            <a:ext cx="7886700" cy="291443"/>
-          </a:xfrm>
-          <a:prstGeom prst="rect">
-            <a:avLst/>
-          </a:prstGeom>
-          <a:noFill/>
-          <a:ln/>
-        </p:spPr>
-        <p:txBody>
-          <a:bodyPr wrap="none" lIns="0" tIns="0" rIns="0" bIns="0" rtlCol="0" anchor="t">
-            <a:spAutoFit/>
-          </a:bodyPr>
-          <a:lstStyle/>
-          <a:p>
-            <a:pPr algn="l" indent="0" marL="0">
-              <a:lnSpc>
-                <a:spcPct val="96000"/>
-              </a:lnSpc>
-              <a:buNone/>
-            </a:pPr>
-            <a:r>
-              <a:rPr lang="en-US" sz="1800" dirty="0">
+            <a:off x="607219" y="2345494"/>
+            <a:ext cx="7886700" cy="307516"/>
+          </a:xfrm>
+          <a:prstGeom prst="rect">
+            <a:avLst/>
+          </a:prstGeom>
+          <a:noFill/>
+          <a:ln/>
+        </p:spPr>
+        <p:txBody>
+          <a:bodyPr wrap="none" lIns="0" tIns="0" rIns="0" bIns="0" rtlCol="0" anchor="t">
+            <a:spAutoFit/>
+          </a:bodyPr>
+          <a:lstStyle/>
+          <a:p>
+            <a:pPr marL="0" indent="0" algn="l">
+              <a:lnSpc>
+                <a:spcPct val="98400"/>
+              </a:lnSpc>
+              <a:buNone/>
+            </a:pPr>
+            <a:r>
+              <a:rPr lang="en-US" sz="1850" dirty="0">
                 <a:solidFill>
                   <a:srgbClr val="2F2F2F"/>
                 </a:solidFill>
@@ -4259,9 +3259,9 @@
                 <a:ea typeface="Calibri" pitchFamily="34" charset="-122"/>
                 <a:cs typeface="Calibri" pitchFamily="34" charset="-120"/>
               </a:rPr>
-              <a:t>Turn stack comments into precise word interfaces.</a:t>
-            </a:r>
-            <a:endParaRPr lang="en-US" sz="1800" dirty="0"/>
+              <a:t>Precisely document word behaviour.</a:t>
+            </a:r>
+            <a:endParaRPr lang="en-US" sz="1850" dirty="0"/>
           </a:p>
         </p:txBody>
       </p:sp>
@@ -4273,29 +3273,29 @@
         </p:nvSpPr>
         <p:spPr>
           <a:xfrm>
-            <a:off x="607219" y="2783384"/>
-            <a:ext cx="7886700" cy="291443"/>
-          </a:xfrm>
-          <a:prstGeom prst="rect">
-            <a:avLst/>
-          </a:prstGeom>
-          <a:noFill/>
-          <a:ln/>
-        </p:spPr>
-        <p:txBody>
-          <a:bodyPr wrap="none" lIns="0" tIns="0" rIns="0" bIns="0" rtlCol="0" anchor="t">
-            <a:spAutoFit/>
-          </a:bodyPr>
-          <a:lstStyle/>
-          <a:p>
-            <a:pPr algn="l" indent="0" marL="0">
-              <a:lnSpc>
-                <a:spcPct val="96000"/>
-              </a:lnSpc>
-              <a:buNone/>
-            </a:pPr>
-            <a:r>
-              <a:rPr lang="en-US" sz="1800" dirty="0">
+            <a:off x="607219" y="2867323"/>
+            <a:ext cx="7886700" cy="307516"/>
+          </a:xfrm>
+          <a:prstGeom prst="rect">
+            <a:avLst/>
+          </a:prstGeom>
+          <a:noFill/>
+          <a:ln/>
+        </p:spPr>
+        <p:txBody>
+          <a:bodyPr wrap="none" lIns="0" tIns="0" rIns="0" bIns="0" rtlCol="0" anchor="t">
+            <a:spAutoFit/>
+          </a:bodyPr>
+          <a:lstStyle/>
+          <a:p>
+            <a:pPr marL="0" indent="0" algn="l">
+              <a:lnSpc>
+                <a:spcPct val="98400"/>
+              </a:lnSpc>
+              <a:buNone/>
+            </a:pPr>
+            <a:r>
+              <a:rPr lang="en-US" sz="1850" dirty="0">
                 <a:solidFill>
                   <a:srgbClr val="2F2F2F"/>
                 </a:solidFill>
@@ -4303,9 +3303,9 @@
                 <a:ea typeface="Calibri" pitchFamily="34" charset="-122"/>
                 <a:cs typeface="Calibri" pitchFamily="34" charset="-120"/>
               </a:rPr>
-              <a:t>Accommodate profile-defined vocabulary and control syntax.</a:t>
-            </a:r>
-            <a:endParaRPr lang="en-US" sz="1800" dirty="0"/>
+              <a:t>Stack-based execution and extensibility complicate analysis.</a:t>
+            </a:r>
+            <a:endParaRPr lang="en-US" sz="1850" dirty="0"/>
           </a:p>
         </p:txBody>
       </p:sp>
@@ -4317,78 +3317,34 @@
         </p:nvSpPr>
         <p:spPr>
           <a:xfrm>
-            <a:off x="607219" y="3610608"/>
-            <a:ext cx="7143750" cy="527968"/>
-          </a:xfrm>
-          <a:prstGeom prst="rect">
-            <a:avLst/>
-          </a:prstGeom>
-          <a:noFill/>
-          <a:ln/>
-        </p:spPr>
-        <p:txBody>
-          <a:bodyPr wrap="square" lIns="0" tIns="0" rIns="0" bIns="0" rtlCol="0" anchor="t">
-            <a:spAutoFit/>
-          </a:bodyPr>
-          <a:lstStyle/>
-          <a:p>
-            <a:pPr algn="l" indent="0" marL="0">
-              <a:lnSpc>
-                <a:spcPct val="105600"/>
-              </a:lnSpc>
-              <a:buNone/>
-            </a:pPr>
-            <a:r>
-              <a:rPr lang="en-US" sz="1500" dirty="0">
-                <a:solidFill>
-                  <a:srgbClr val="00A3A1"/>
+            <a:off x="8435987" y="4997053"/>
+            <a:ext cx="57931" cy="139303"/>
+          </a:xfrm>
+          <a:prstGeom prst="rect">
+            <a:avLst/>
+          </a:prstGeom>
+          <a:noFill/>
+          <a:ln/>
+        </p:spPr>
+        <p:txBody>
+          <a:bodyPr wrap="none" lIns="0" tIns="0" rIns="0" bIns="0" rtlCol="0" anchor="t">
+            <a:spAutoFit/>
+          </a:bodyPr>
+          <a:lstStyle/>
+          <a:p>
+            <a:pPr marL="0" indent="0" algn="l">
+              <a:buNone/>
+            </a:pPr>
+            <a:r>
+              <a:rPr lang="en-US" sz="850" dirty="0">
+                <a:solidFill>
+                  <a:srgbClr val="888888"/>
                 </a:solidFill>
                 <a:latin typeface="Calibri" pitchFamily="34" charset="0"/>
                 <a:ea typeface="Calibri" pitchFamily="34" charset="-122"/>
                 <a:cs typeface="Calibri" pitchFamily="34" charset="-120"/>
               </a:rPr>
-              <a:t>Stack-effect calculus → typed wildcards and inheritance → configurable source-level checking</a:t>
-            </a:r>
-            <a:endParaRPr lang="en-US" sz="1500" dirty="0"/>
-          </a:p>
-        </p:txBody>
-      </p:sp>
-      <p:sp>
-        <p:nvSpPr>
-          <p:cNvPr id="9" name="Text 6"/>
-          <p:cNvSpPr/>
-          <p:nvPr/>
-        </p:nvSpPr>
-        <p:spPr>
-          <a:xfrm>
-            <a:off x="8836037" y="4832747"/>
-            <a:ext cx="57931" cy="139303"/>
-          </a:xfrm>
-          <a:prstGeom prst="rect">
-            <a:avLst/>
-          </a:prstGeom>
-          <a:noFill/>
-          <a:ln/>
-        </p:spPr>
-        <p:txBody>
-          <a:bodyPr wrap="none" lIns="0" tIns="0" rIns="0" bIns="0" rtlCol="0" anchor="t">
-            <a:spAutoFit/>
-          </a:bodyPr>
-          <a:lstStyle/>
-          <a:p>
-            <a:pPr algn="l" indent="0" marL="0">
-              <a:buNone/>
-            </a:pPr>
-            <a:r>
-              <a:rPr lang="en-US" sz="850" dirty="0">
-                <a:solidFill>
-                  <a:srgbClr val="888888"/>
-                </a:solidFill>
-                <a:latin typeface="Calibri" pitchFamily="34" charset="0"/>
-                <a:ea typeface="Calibri" pitchFamily="34" charset="-122"/>
-                <a:cs typeface="Calibri" pitchFamily="34" charset="-120"/>
-              </a:rPr>
-              <a:t>1</a:t>
+              <a:t>2</a:t>
             </a:r>
             <a:endParaRPr lang="en-US" sz="850" dirty="0"/>
           </a:p>
@@ -4421,14 +3377,14 @@
       </p:grpSpPr>
       <p:pic>
         <p:nvPicPr>
-          <p:cNvPr id="2" name="Image 0" descr="preencoded.png">    </p:cNvPr>
+          <p:cNvPr id="2" name="Image 0" descr="preencoded.png"/>
           <p:cNvPicPr>
             <a:picLocks noChangeAspect="1"/>
           </p:cNvPicPr>
           <p:nvPr/>
         </p:nvPicPr>
         <p:blipFill>
-          <a:blip r:embed="rId1"/>
+          <a:blip r:embed="rId3"/>
           <a:stretch>
             <a:fillRect/>
           </a:stretch>
@@ -4466,7 +3422,7 @@
           </a:bodyPr>
           <a:lstStyle/>
           <a:p>
-            <a:pPr algn="l" indent="0" marL="0">
+            <a:pPr marL="0" indent="0" algn="l">
               <a:lnSpc>
                 <a:spcPct val="83200"/>
               </a:lnSpc>
@@ -4510,11 +3466,11 @@
           </a:bodyPr>
           <a:lstStyle/>
           <a:p>
-            <a:pPr algn="l" indent="0" marL="0">
-              <a:buNone/>
-            </a:pPr>
-            <a:r>
-              <a:rPr lang="en-US" sz="1000" b="1" spc="1" kern="0" dirty="0">
+            <a:pPr marL="0" indent="0" algn="l">
+              <a:buNone/>
+            </a:pPr>
+            <a:r>
+              <a:rPr lang="en-US" sz="1000" b="1" kern="0" spc="1" dirty="0">
                 <a:solidFill>
                   <a:srgbClr val="00A3A1"/>
                 </a:solidFill>
@@ -4551,7 +3507,7 @@
           </a:bodyPr>
           <a:lstStyle/>
           <a:p>
-            <a:pPr algn="l" indent="0" marL="0">
+            <a:pPr marL="0" indent="0" algn="l">
               <a:lnSpc>
                 <a:spcPct val="96000"/>
               </a:lnSpc>
@@ -4617,7 +3573,7 @@
           </a:bodyPr>
           <a:lstStyle/>
           <a:p>
-            <a:pPr algn="l" indent="0" marL="0">
+            <a:pPr marL="0" indent="0" algn="l">
               <a:lnSpc>
                 <a:spcPct val="97600"/>
               </a:lnSpc>
@@ -4661,7 +3617,7 @@
           </a:bodyPr>
           <a:lstStyle/>
           <a:p>
-            <a:pPr algn="l" indent="0" marL="0">
+            <a:pPr marL="0" indent="0" algn="l">
               <a:lnSpc>
                 <a:spcPct val="97600"/>
               </a:lnSpc>
@@ -4705,7 +3661,7 @@
           </a:bodyPr>
           <a:lstStyle/>
           <a:p>
-            <a:pPr algn="l" indent="0" marL="0">
+            <a:pPr marL="0" indent="0" algn="l">
               <a:lnSpc>
                 <a:spcPct val="97600"/>
               </a:lnSpc>
@@ -4749,7 +3705,7 @@
           </a:bodyPr>
           <a:lstStyle/>
           <a:p>
-            <a:pPr algn="l" indent="0" marL="0">
+            <a:pPr marL="0" indent="0" algn="l">
               <a:lnSpc>
                 <a:spcPct val="97600"/>
               </a:lnSpc>
@@ -4793,7 +3749,7 @@
           </a:bodyPr>
           <a:lstStyle/>
           <a:p>
-            <a:pPr algn="l" indent="0" marL="0">
+            <a:pPr marL="0" indent="0" algn="l">
               <a:lnSpc>
                 <a:spcPct val="97600"/>
               </a:lnSpc>
@@ -4837,7 +3793,7 @@
           </a:bodyPr>
           <a:lstStyle/>
           <a:p>
-            <a:pPr algn="l" indent="0" marL="0">
+            <a:pPr marL="0" indent="0" algn="l">
               <a:lnSpc>
                 <a:spcPct val="97600"/>
               </a:lnSpc>
@@ -4881,7 +3837,7 @@
           </a:bodyPr>
           <a:lstStyle/>
           <a:p>
-            <a:pPr algn="l" indent="0" marL="0">
+            <a:pPr marL="0" indent="0" algn="l">
               <a:lnSpc>
                 <a:spcPct val="97600"/>
               </a:lnSpc>
@@ -4925,7 +3881,7 @@
           </a:bodyPr>
           <a:lstStyle/>
           <a:p>
-            <a:pPr algn="l" indent="0" marL="0">
+            <a:pPr marL="0" indent="0" algn="l">
               <a:lnSpc>
                 <a:spcPct val="97600"/>
               </a:lnSpc>
@@ -4969,7 +3925,7 @@
           </a:bodyPr>
           <a:lstStyle/>
           <a:p>
-            <a:pPr algn="l" indent="0" marL="0">
+            <a:pPr marL="0" indent="0" algn="l">
               <a:lnSpc>
                 <a:spcPct val="97600"/>
               </a:lnSpc>
@@ -5013,7 +3969,7 @@
           </a:bodyPr>
           <a:lstStyle/>
           <a:p>
-            <a:pPr algn="l" indent="0" marL="0">
+            <a:pPr marL="0" indent="0" algn="l">
               <a:lnSpc>
                 <a:spcPct val="97600"/>
               </a:lnSpc>
@@ -5057,7 +4013,7 @@
           </a:bodyPr>
           <a:lstStyle/>
           <a:p>
-            <a:pPr algn="l" indent="0" marL="0">
+            <a:pPr marL="0" indent="0" algn="l">
               <a:lnSpc>
                 <a:spcPct val="97600"/>
               </a:lnSpc>
@@ -5101,7 +4057,7 @@
           </a:bodyPr>
           <a:lstStyle/>
           <a:p>
-            <a:pPr algn="l" indent="0" marL="0">
+            <a:pPr marL="0" indent="0" algn="l">
               <a:lnSpc>
                 <a:spcPct val="97600"/>
               </a:lnSpc>
@@ -5145,7 +4101,7 @@
           </a:bodyPr>
           <a:lstStyle/>
           <a:p>
-            <a:pPr algn="l" indent="0" marL="0">
+            <a:pPr marL="0" indent="0" algn="l">
               <a:lnSpc>
                 <a:spcPct val="97600"/>
               </a:lnSpc>
@@ -5189,7 +4145,7 @@
           </a:bodyPr>
           <a:lstStyle/>
           <a:p>
-            <a:pPr algn="l" indent="0" marL="0">
+            <a:pPr marL="0" indent="0" algn="l">
               <a:lnSpc>
                 <a:spcPct val="97600"/>
               </a:lnSpc>
@@ -5233,7 +4189,7 @@
           </a:bodyPr>
           <a:lstStyle/>
           <a:p>
-            <a:pPr algn="l" indent="0" marL="0">
+            <a:pPr marL="0" indent="0" algn="l">
               <a:lnSpc>
                 <a:spcPct val="97600"/>
               </a:lnSpc>
@@ -5277,7 +4233,7 @@
           </a:bodyPr>
           <a:lstStyle/>
           <a:p>
-            <a:pPr algn="l" indent="0" marL="0">
+            <a:pPr marL="0" indent="0" algn="l">
               <a:lnSpc>
                 <a:spcPct val="100000"/>
               </a:lnSpc>
@@ -5343,7 +4299,7 @@
           </a:bodyPr>
           <a:lstStyle/>
           <a:p>
-            <a:pPr algn="l" indent="0" marL="0">
+            <a:pPr marL="0" indent="0" algn="l">
               <a:buNone/>
             </a:pPr>
             <a:r>
@@ -5370,6 +4326,510 @@
 </file>
 
 <file path=ppt/slides/slide4.xml><?xml version="1.0" encoding="utf-8"?>
+<p:sld xmlns:a="http://schemas.openxmlformats.org/drawingml/2006/main" xmlns:r="http://schemas.openxmlformats.org/officeDocument/2006/relationships" xmlns:p="http://schemas.openxmlformats.org/presentationml/2006/main">
+  <p:cSld name="Slide 6">
+    <p:spTree>
+      <p:nvGrpSpPr>
+        <p:cNvPr id="1" name=""/>
+        <p:cNvGrpSpPr/>
+        <p:nvPr/>
+      </p:nvGrpSpPr>
+      <p:grpSpPr>
+        <a:xfrm>
+          <a:off x="0" y="0"/>
+          <a:ext cx="0" cy="0"/>
+          <a:chOff x="0" y="0"/>
+          <a:chExt cx="0" cy="0"/>
+        </a:xfrm>
+      </p:grpSpPr>
+      <p:pic>
+        <p:nvPicPr>
+          <p:cNvPr id="2" name="Image 0" descr="preencoded.png"/>
+          <p:cNvPicPr>
+            <a:picLocks noChangeAspect="1"/>
+          </p:cNvPicPr>
+          <p:nvPr/>
+        </p:nvPicPr>
+        <p:blipFill>
+          <a:blip r:embed="rId3"/>
+          <a:stretch>
+            <a:fillRect/>
+          </a:stretch>
+        </p:blipFill>
+        <p:spPr>
+          <a:xfrm>
+            <a:off x="0" y="0"/>
+            <a:ext cx="9144000" cy="5143500"/>
+          </a:xfrm>
+          <a:prstGeom prst="rect">
+            <a:avLst/>
+          </a:prstGeom>
+        </p:spPr>
+      </p:pic>
+      <p:sp>
+        <p:nvSpPr>
+          <p:cNvPr id="3" name="Text 0"/>
+          <p:cNvSpPr/>
+          <p:nvPr/>
+        </p:nvSpPr>
+        <p:spPr>
+          <a:xfrm>
+            <a:off x="607219" y="328613"/>
+            <a:ext cx="7886700" cy="408589"/>
+          </a:xfrm>
+          <a:prstGeom prst="rect">
+            <a:avLst/>
+          </a:prstGeom>
+          <a:noFill/>
+          <a:ln/>
+        </p:spPr>
+        <p:txBody>
+          <a:bodyPr wrap="none" lIns="0" tIns="0" rIns="0" bIns="0" rtlCol="0" anchor="t">
+            <a:spAutoFit/>
+          </a:bodyPr>
+          <a:lstStyle/>
+          <a:p>
+            <a:pPr marL="0" indent="0" algn="l">
+              <a:lnSpc>
+                <a:spcPct val="83200"/>
+              </a:lnSpc>
+              <a:buNone/>
+            </a:pPr>
+            <a:r>
+              <a:rPr lang="en-US" sz="3000" dirty="0">
+                <a:solidFill>
+                  <a:srgbClr val="003A70"/>
+                </a:solidFill>
+                <a:latin typeface="Calibri Light" pitchFamily="34" charset="0"/>
+                <a:ea typeface="Calibri Light" pitchFamily="34" charset="-122"/>
+                <a:cs typeface="Calibri Light" pitchFamily="34" charset="-120"/>
+              </a:rPr>
+              <a:t>Composition unifies boundaries</a:t>
+            </a:r>
+            <a:endParaRPr lang="en-US" sz="3000" dirty="0"/>
+          </a:p>
+        </p:txBody>
+      </p:sp>
+      <p:sp>
+        <p:nvSpPr>
+          <p:cNvPr id="4" name="Text 1"/>
+          <p:cNvSpPr/>
+          <p:nvPr/>
+        </p:nvSpPr>
+        <p:spPr>
+          <a:xfrm>
+            <a:off x="607219" y="965802"/>
+            <a:ext cx="7886700" cy="321469"/>
+          </a:xfrm>
+          <a:prstGeom prst="rect">
+            <a:avLst/>
+          </a:prstGeom>
+          <a:noFill/>
+          <a:ln/>
+        </p:spPr>
+        <p:txBody>
+          <a:bodyPr wrap="square" lIns="0" tIns="0" rIns="0" bIns="0" rtlCol="0" anchor="t">
+            <a:spAutoFit/>
+          </a:bodyPr>
+          <a:lstStyle/>
+          <a:p>
+            <a:pPr marL="0" indent="0" algn="l">
+              <a:buNone/>
+            </a:pPr>
+            <a:r>
+              <a:rPr lang="en-US" sz="1650" b="1" dirty="0">
+                <a:solidFill>
+                  <a:srgbClr val="003A70"/>
+                </a:solidFill>
+                <a:latin typeface="Courier New" pitchFamily="34" charset="0"/>
+                <a:ea typeface="Courier New" pitchFamily="34" charset="-122"/>
+                <a:cs typeface="Courier New" pitchFamily="34" charset="-120"/>
+              </a:rPr>
+              <a:t>For all s ∈ S: s · Ø = Ø · s = Ø</a:t>
+            </a:r>
+            <a:endParaRPr lang="en-US" sz="1650" dirty="0"/>
+          </a:p>
+        </p:txBody>
+      </p:sp>
+      <p:sp>
+        <p:nvSpPr>
+          <p:cNvPr id="5" name="Text 2"/>
+          <p:cNvSpPr/>
+          <p:nvPr/>
+        </p:nvSpPr>
+        <p:spPr>
+          <a:xfrm>
+            <a:off x="607219" y="1508727"/>
+            <a:ext cx="7886700" cy="225028"/>
+          </a:xfrm>
+          <a:prstGeom prst="rect">
+            <a:avLst/>
+          </a:prstGeom>
+          <a:noFill/>
+          <a:ln/>
+        </p:spPr>
+        <p:txBody>
+          <a:bodyPr wrap="square" lIns="0" tIns="0" rIns="0" bIns="0" rtlCol="0" anchor="t">
+            <a:spAutoFit/>
+          </a:bodyPr>
+          <a:lstStyle/>
+          <a:p>
+            <a:pPr marL="0" indent="0" algn="l">
+              <a:buNone/>
+            </a:pPr>
+            <a:r>
+              <a:rPr lang="en-US" sz="1200" b="1" kern="0" spc="1" dirty="0">
+                <a:solidFill>
+                  <a:srgbClr val="00A3A1"/>
+                </a:solidFill>
+                <a:latin typeface="Calibri" pitchFamily="34" charset="0"/>
+                <a:ea typeface="Calibri" pitchFamily="34" charset="-122"/>
+                <a:cs typeface="Calibri" pitchFamily="34" charset="-120"/>
+              </a:rPr>
+              <a:t>FOR ALL a, b, c, d, e, f ∈ T*</a:t>
+            </a:r>
+            <a:endParaRPr lang="en-US" sz="1200" dirty="0"/>
+          </a:p>
+        </p:txBody>
+      </p:sp>
+      <p:sp>
+        <p:nvSpPr>
+          <p:cNvPr id="6" name="Text 3"/>
+          <p:cNvSpPr/>
+          <p:nvPr/>
+        </p:nvSpPr>
+        <p:spPr>
+          <a:xfrm>
+            <a:off x="607219" y="1848055"/>
+            <a:ext cx="7886700" cy="253603"/>
+          </a:xfrm>
+          <a:prstGeom prst="rect">
+            <a:avLst/>
+          </a:prstGeom>
+          <a:noFill/>
+          <a:ln/>
+        </p:spPr>
+        <p:txBody>
+          <a:bodyPr wrap="square" lIns="0" tIns="0" rIns="0" bIns="0" rtlCol="0" anchor="t">
+            <a:spAutoFit/>
+          </a:bodyPr>
+          <a:lstStyle/>
+          <a:p>
+            <a:pPr marL="0" indent="0" algn="l">
+              <a:buNone/>
+            </a:pPr>
+            <a:r>
+              <a:rPr lang="en-US" sz="1550" b="1" dirty="0">
+                <a:solidFill>
+                  <a:srgbClr val="003A70"/>
+                </a:solidFill>
+                <a:latin typeface="Courier New" pitchFamily="34" charset="0"/>
+                <a:ea typeface="Courier New" pitchFamily="34" charset="-122"/>
+                <a:cs typeface="Courier New" pitchFamily="34" charset="-120"/>
+              </a:rPr>
+              <a:t>(a → b) · (eb → d) = (ea → d)</a:t>
+            </a:r>
+            <a:endParaRPr lang="en-US" sz="1550" dirty="0"/>
+          </a:p>
+        </p:txBody>
+      </p:sp>
+      <p:sp>
+        <p:nvSpPr>
+          <p:cNvPr id="7" name="Text 4"/>
+          <p:cNvSpPr/>
+          <p:nvPr/>
+        </p:nvSpPr>
+        <p:spPr>
+          <a:xfrm>
+            <a:off x="607219" y="2194527"/>
+            <a:ext cx="7886700" cy="253603"/>
+          </a:xfrm>
+          <a:prstGeom prst="rect">
+            <a:avLst/>
+          </a:prstGeom>
+          <a:noFill/>
+          <a:ln/>
+        </p:spPr>
+        <p:txBody>
+          <a:bodyPr wrap="square" lIns="0" tIns="0" rIns="0" bIns="0" rtlCol="0" anchor="t">
+            <a:spAutoFit/>
+          </a:bodyPr>
+          <a:lstStyle/>
+          <a:p>
+            <a:pPr marL="0" indent="0" algn="l">
+              <a:buNone/>
+            </a:pPr>
+            <a:r>
+              <a:rPr lang="en-US" sz="1550" b="1" dirty="0">
+                <a:solidFill>
+                  <a:srgbClr val="003A70"/>
+                </a:solidFill>
+                <a:latin typeface="Courier New" pitchFamily="34" charset="0"/>
+                <a:ea typeface="Courier New" pitchFamily="34" charset="-122"/>
+                <a:cs typeface="Courier New" pitchFamily="34" charset="-120"/>
+              </a:rPr>
+              <a:t>(a → fc) · (c → d) = (a → fd)</a:t>
+            </a:r>
+            <a:endParaRPr lang="en-US" sz="1550" dirty="0"/>
+          </a:p>
+        </p:txBody>
+      </p:sp>
+      <p:sp>
+        <p:nvSpPr>
+          <p:cNvPr id="8" name="Text 5"/>
+          <p:cNvSpPr/>
+          <p:nvPr/>
+        </p:nvSpPr>
+        <p:spPr>
+          <a:xfrm>
+            <a:off x="607219" y="2540998"/>
+            <a:ext cx="7886700" cy="242888"/>
+          </a:xfrm>
+          <a:prstGeom prst="rect">
+            <a:avLst/>
+          </a:prstGeom>
+          <a:noFill/>
+          <a:ln/>
+        </p:spPr>
+        <p:txBody>
+          <a:bodyPr wrap="square" lIns="0" tIns="0" rIns="0" bIns="0" rtlCol="0" anchor="t">
+            <a:spAutoFit/>
+          </a:bodyPr>
+          <a:lstStyle/>
+          <a:p>
+            <a:pPr marL="0" indent="0" algn="l">
+              <a:buNone/>
+            </a:pPr>
+            <a:r>
+              <a:rPr lang="en-US" sz="1600" dirty="0">
+                <a:solidFill>
+                  <a:srgbClr val="2F2F2F"/>
+                </a:solidFill>
+                <a:latin typeface="Courier New" pitchFamily="34" charset="0"/>
+                <a:ea typeface="Courier New" pitchFamily="34" charset="-122"/>
+                <a:cs typeface="Courier New" pitchFamily="34" charset="-120"/>
+              </a:rPr>
+              <a:t>Ø, otherwise</a:t>
+            </a:r>
+            <a:endParaRPr lang="en-US" sz="1600" dirty="0"/>
+          </a:p>
+        </p:txBody>
+      </p:sp>
+      <p:sp>
+        <p:nvSpPr>
+          <p:cNvPr id="9" name="Text 6"/>
+          <p:cNvSpPr/>
+          <p:nvPr/>
+        </p:nvSpPr>
+        <p:spPr>
+          <a:xfrm>
+            <a:off x="607219" y="2962480"/>
+            <a:ext cx="7886700" cy="239595"/>
+          </a:xfrm>
+          <a:prstGeom prst="rect">
+            <a:avLst/>
+          </a:prstGeom>
+          <a:noFill/>
+          <a:ln/>
+        </p:spPr>
+        <p:txBody>
+          <a:bodyPr wrap="none" lIns="0" tIns="0" rIns="0" bIns="0" rtlCol="0" anchor="t">
+            <a:spAutoFit/>
+          </a:bodyPr>
+          <a:lstStyle/>
+          <a:p>
+            <a:pPr marL="0" indent="0" algn="l">
+              <a:lnSpc>
+                <a:spcPct val="94400"/>
+              </a:lnSpc>
+              <a:buNone/>
+            </a:pPr>
+            <a:r>
+              <a:rPr lang="en-US" sz="1400" b="1" dirty="0">
+                <a:solidFill>
+                  <a:srgbClr val="003A70"/>
+                </a:solidFill>
+                <a:latin typeface="Courier New" pitchFamily="34" charset="0"/>
+                <a:ea typeface="Courier New" pitchFamily="34" charset="-122"/>
+                <a:cs typeface="Courier New" pitchFamily="34" charset="-120"/>
+              </a:rPr>
+              <a:t>Ø</a:t>
+            </a:r>
+            <a:r>
+              <a:rPr lang="en-US" sz="1500" dirty="0">
+                <a:solidFill>
+                  <a:srgbClr val="2F2F2F"/>
+                </a:solidFill>
+                <a:latin typeface="Calibri" pitchFamily="34" charset="0"/>
+                <a:ea typeface="Calibri" pitchFamily="34" charset="-122"/>
+                <a:cs typeface="Calibri" pitchFamily="34" charset="-120"/>
+              </a:rPr>
+              <a:t> is zero.</a:t>
+            </a:r>
+            <a:endParaRPr lang="en-US" sz="1400" dirty="0"/>
+          </a:p>
+        </p:txBody>
+      </p:sp>
+      <p:sp>
+        <p:nvSpPr>
+          <p:cNvPr id="10" name="Text 7"/>
+          <p:cNvSpPr/>
+          <p:nvPr/>
+        </p:nvSpPr>
+        <p:spPr>
+          <a:xfrm>
+            <a:off x="607219" y="3252081"/>
+            <a:ext cx="7886700" cy="239595"/>
+          </a:xfrm>
+          <a:prstGeom prst="rect">
+            <a:avLst/>
+          </a:prstGeom>
+          <a:noFill/>
+          <a:ln/>
+        </p:spPr>
+        <p:txBody>
+          <a:bodyPr wrap="none" lIns="0" tIns="0" rIns="0" bIns="0" rtlCol="0" anchor="t">
+            <a:spAutoFit/>
+          </a:bodyPr>
+          <a:lstStyle/>
+          <a:p>
+            <a:pPr marL="0" indent="0" algn="l">
+              <a:lnSpc>
+                <a:spcPct val="94400"/>
+              </a:lnSpc>
+              <a:buNone/>
+            </a:pPr>
+            <a:r>
+              <a:rPr lang="en-US" sz="1400" b="1" dirty="0">
+                <a:solidFill>
+                  <a:srgbClr val="003A70"/>
+                </a:solidFill>
+                <a:latin typeface="Courier New" pitchFamily="34" charset="0"/>
+                <a:ea typeface="Courier New" pitchFamily="34" charset="-122"/>
+                <a:cs typeface="Courier New" pitchFamily="34" charset="-120"/>
+              </a:rPr>
+              <a:t>1 = ( → )</a:t>
+            </a:r>
+            <a:r>
+              <a:rPr lang="en-US" sz="1500" dirty="0">
+                <a:solidFill>
+                  <a:srgbClr val="2F2F2F"/>
+                </a:solidFill>
+                <a:latin typeface="Calibri" pitchFamily="34" charset="0"/>
+                <a:ea typeface="Calibri" pitchFamily="34" charset="-122"/>
+                <a:cs typeface="Calibri" pitchFamily="34" charset="-120"/>
+              </a:rPr>
+              <a:t> is the unity for composition.</a:t>
+            </a:r>
+            <a:endParaRPr lang="en-US" sz="1400" dirty="0"/>
+          </a:p>
+        </p:txBody>
+      </p:sp>
+      <p:sp>
+        <p:nvSpPr>
+          <p:cNvPr id="11" name="Text 8"/>
+          <p:cNvSpPr/>
+          <p:nvPr/>
+        </p:nvSpPr>
+        <p:spPr>
+          <a:xfrm>
+            <a:off x="607219" y="3541681"/>
+            <a:ext cx="7886700" cy="239595"/>
+          </a:xfrm>
+          <a:prstGeom prst="rect">
+            <a:avLst/>
+          </a:prstGeom>
+          <a:noFill/>
+          <a:ln/>
+        </p:spPr>
+        <p:txBody>
+          <a:bodyPr wrap="none" lIns="0" tIns="0" rIns="0" bIns="0" rtlCol="0" anchor="t">
+            <a:spAutoFit/>
+          </a:bodyPr>
+          <a:lstStyle/>
+          <a:p>
+            <a:pPr marL="0" indent="0" algn="l">
+              <a:lnSpc>
+                <a:spcPct val="94400"/>
+              </a:lnSpc>
+              <a:buNone/>
+            </a:pPr>
+            <a:r>
+              <a:rPr lang="en-US" sz="1400" b="1" dirty="0">
+                <a:solidFill>
+                  <a:srgbClr val="003A70"/>
+                </a:solidFill>
+                <a:latin typeface="Courier New" pitchFamily="34" charset="0"/>
+                <a:ea typeface="Courier New" pitchFamily="34" charset="-122"/>
+                <a:cs typeface="Courier New" pitchFamily="34" charset="-120"/>
+              </a:rPr>
+              <a:t>S</a:t>
+            </a:r>
+            <a:r>
+              <a:rPr lang="en-US" sz="1500" dirty="0">
+                <a:solidFill>
+                  <a:srgbClr val="2F2F2F"/>
+                </a:solidFill>
+                <a:latin typeface="Calibri" pitchFamily="34" charset="0"/>
+                <a:ea typeface="Calibri" pitchFamily="34" charset="-122"/>
+                <a:cs typeface="Calibri" pitchFamily="34" charset="-120"/>
+              </a:rPr>
+              <a:t> is a polycyclic monoid.</a:t>
+            </a:r>
+            <a:endParaRPr lang="en-US" sz="1400" dirty="0"/>
+          </a:p>
+        </p:txBody>
+      </p:sp>
+      <p:sp>
+        <p:nvSpPr>
+          <p:cNvPr id="12" name="Text 9"/>
+          <p:cNvSpPr/>
+          <p:nvPr/>
+        </p:nvSpPr>
+        <p:spPr>
+          <a:xfrm>
+            <a:off x="8435987" y="4997053"/>
+            <a:ext cx="57931" cy="139303"/>
+          </a:xfrm>
+          <a:prstGeom prst="rect">
+            <a:avLst/>
+          </a:prstGeom>
+          <a:noFill/>
+          <a:ln/>
+        </p:spPr>
+        <p:txBody>
+          <a:bodyPr wrap="none" lIns="0" tIns="0" rIns="0" bIns="0" rtlCol="0" anchor="t">
+            <a:spAutoFit/>
+          </a:bodyPr>
+          <a:lstStyle/>
+          <a:p>
+            <a:pPr marL="0" indent="0" algn="l">
+              <a:buNone/>
+            </a:pPr>
+            <a:r>
+              <a:rPr lang="en-US" sz="850" dirty="0">
+                <a:solidFill>
+                  <a:srgbClr val="888888"/>
+                </a:solidFill>
+                <a:latin typeface="Calibri" pitchFamily="34" charset="0"/>
+                <a:ea typeface="Calibri" pitchFamily="34" charset="-122"/>
+                <a:cs typeface="Calibri" pitchFamily="34" charset="-120"/>
+              </a:rPr>
+              <a:t>6</a:t>
+            </a:r>
+            <a:endParaRPr lang="en-US" sz="850" dirty="0"/>
+          </a:p>
+        </p:txBody>
+      </p:sp>
+    </p:spTree>
+  </p:cSld>
+  <p:clrMapOvr>
+    <a:masterClrMapping/>
+  </p:clrMapOvr>
+</p:sld>
+</file>
+
+<file path=ppt/slides/slide5.xml><?xml version="1.0" encoding="utf-8"?>
 <p:sld xmlns:a="http://schemas.openxmlformats.org/drawingml/2006/main" xmlns:r="http://schemas.openxmlformats.org/officeDocument/2006/relationships" xmlns:p="http://schemas.openxmlformats.org/presentationml/2006/main">
   <p:cSld name="Slide 4">
     <p:spTree>
@@ -5388,14 +4848,14 @@
       </p:grpSpPr>
       <p:pic>
         <p:nvPicPr>
-          <p:cNvPr id="2" name="Image 0" descr="preencoded.png">    </p:cNvPr>
+          <p:cNvPr id="2" name="Image 0" descr="preencoded.png"/>
           <p:cNvPicPr>
             <a:picLocks noChangeAspect="1"/>
           </p:cNvPicPr>
           <p:nvPr/>
         </p:nvPicPr>
         <p:blipFill>
-          <a:blip r:embed="rId1"/>
+          <a:blip r:embed="rId3"/>
           <a:stretch>
             <a:fillRect/>
           </a:stretch>
@@ -5433,7 +4893,7 @@
           </a:bodyPr>
           <a:lstStyle/>
           <a:p>
-            <a:pPr algn="l" indent="0" marL="0">
+            <a:pPr marL="0" indent="0" algn="l">
               <a:lnSpc>
                 <a:spcPct val="83200"/>
               </a:lnSpc>
@@ -5477,11 +4937,11 @@
           </a:bodyPr>
           <a:lstStyle/>
           <a:p>
-            <a:pPr algn="l" indent="0" marL="0">
-              <a:buNone/>
-            </a:pPr>
-            <a:r>
-              <a:rPr lang="en-US" sz="1050" b="1" spc="1" kern="0" dirty="0">
+            <a:pPr marL="0" indent="0" algn="l">
+              <a:buNone/>
+            </a:pPr>
+            <a:r>
+              <a:rPr lang="en-US" sz="1050" b="1" kern="0" spc="1" dirty="0">
                 <a:solidFill>
                   <a:srgbClr val="00A3A1"/>
                 </a:solidFill>
@@ -5518,7 +4978,7 @@
           </a:bodyPr>
           <a:lstStyle/>
           <a:p>
-            <a:pPr algn="l" indent="0" marL="0">
+            <a:pPr marL="0" indent="0" algn="l">
               <a:lnSpc>
                 <a:spcPct val="92000"/>
               </a:lnSpc>
@@ -5628,7 +5088,7 @@
           </a:bodyPr>
           <a:lstStyle/>
           <a:p>
-            <a:pPr algn="l" indent="0" marL="0">
+            <a:pPr marL="0" indent="0" algn="l">
               <a:lnSpc>
                 <a:spcPct val="92000"/>
               </a:lnSpc>
@@ -5694,7 +5154,7 @@
           </a:bodyPr>
           <a:lstStyle/>
           <a:p>
-            <a:pPr algn="l" indent="0" marL="0">
+            <a:pPr marL="0" indent="0" algn="l">
               <a:lnSpc>
                 <a:spcPct val="92000"/>
               </a:lnSpc>
@@ -5782,7 +5242,7 @@
           </a:bodyPr>
           <a:lstStyle/>
           <a:p>
-            <a:pPr algn="l" indent="0" marL="0">
+            <a:pPr marL="0" indent="0" algn="l">
               <a:lnSpc>
                 <a:spcPct val="104000"/>
               </a:lnSpc>
@@ -5852,18 +5312,7 @@
                 <a:ea typeface="Calibri" pitchFamily="34" charset="-122"/>
                 <a:cs typeface="Calibri" pitchFamily="34" charset="-120"/>
               </a:rPr>
-              <a:t>: it is more exact, and the relation is </a:t>
-            </a:r>
-            <a:r>
-              <a:rPr lang="en-US" sz="1750" dirty="0">
-                <a:solidFill>
-                  <a:srgbClr val="2F2F2F"/>
-                </a:solidFill>
-                <a:latin typeface="Calibri" pitchFamily="34" charset="0"/>
-                <a:ea typeface="Calibri" pitchFamily="34" charset="-122"/>
-                <a:cs typeface="Calibri" pitchFamily="34" charset="-120"/>
-              </a:rPr>
-              <a:t>transitive.</a:t>
+              <a:t>: it is more exact, and the relation is transitive.</a:t>
             </a:r>
             <a:endParaRPr lang="en-US" sz="1650" dirty="0"/>
           </a:p>
@@ -5892,7 +5341,7 @@
           </a:bodyPr>
           <a:lstStyle/>
           <a:p>
-            <a:pPr algn="l" indent="0" marL="0">
+            <a:pPr marL="0" indent="0" algn="l">
               <a:buNone/>
             </a:pPr>
             <a:r>
@@ -5918,7 +5367,7 @@
 </p:sld>
 </file>
 
-<file path=ppt/slides/slide5.xml><?xml version="1.0" encoding="utf-8"?>
+<file path=ppt/slides/slide6.xml><?xml version="1.0" encoding="utf-8"?>
 <p:sld xmlns:a="http://schemas.openxmlformats.org/drawingml/2006/main" xmlns:r="http://schemas.openxmlformats.org/officeDocument/2006/relationships" xmlns:p="http://schemas.openxmlformats.org/presentationml/2006/main">
   <p:cSld name="Slide 5">
     <p:spTree>
@@ -5937,14 +5386,14 @@
       </p:grpSpPr>
       <p:pic>
         <p:nvPicPr>
-          <p:cNvPr id="2" name="Image 0" descr="preencoded.png">    </p:cNvPr>
+          <p:cNvPr id="2" name="Image 0" descr="preencoded.png"/>
           <p:cNvPicPr>
             <a:picLocks noChangeAspect="1"/>
           </p:cNvPicPr>
           <p:nvPr/>
         </p:nvPicPr>
         <p:blipFill>
-          <a:blip r:embed="rId1"/>
+          <a:blip r:embed="rId3"/>
           <a:stretch>
             <a:fillRect/>
           </a:stretch>
@@ -5982,7 +5431,7 @@
           </a:bodyPr>
           <a:lstStyle/>
           <a:p>
-            <a:pPr algn="l" indent="0" marL="0">
+            <a:pPr marL="0" indent="0" algn="l">
               <a:lnSpc>
                 <a:spcPct val="83200"/>
               </a:lnSpc>
@@ -6026,11 +5475,11 @@
           </a:bodyPr>
           <a:lstStyle/>
           <a:p>
-            <a:pPr algn="l" indent="0" marL="0">
-              <a:buNone/>
-            </a:pPr>
-            <a:r>
-              <a:rPr lang="en-US" sz="1000" b="1" spc="1" kern="0" dirty="0">
+            <a:pPr marL="0" indent="0" algn="l">
+              <a:buNone/>
+            </a:pPr>
+            <a:r>
+              <a:rPr lang="en-US" sz="1000" b="1" kern="0" spc="1" dirty="0">
                 <a:solidFill>
                   <a:srgbClr val="00A3A1"/>
                 </a:solidFill>
@@ -6067,7 +5516,7 @@
           </a:bodyPr>
           <a:lstStyle/>
           <a:p>
-            <a:pPr algn="l" indent="0" marL="0">
+            <a:pPr marL="0" indent="0" algn="l">
               <a:lnSpc>
                 <a:spcPct val="97600"/>
               </a:lnSpc>
@@ -6111,7 +5560,7 @@
           </a:bodyPr>
           <a:lstStyle/>
           <a:p>
-            <a:pPr algn="l" indent="0" marL="0">
+            <a:pPr marL="0" indent="0" algn="l">
               <a:lnSpc>
                 <a:spcPct val="97600"/>
               </a:lnSpc>
@@ -6155,7 +5604,7 @@
           </a:bodyPr>
           <a:lstStyle/>
           <a:p>
-            <a:pPr algn="l" indent="0" marL="0">
+            <a:pPr marL="0" indent="0" algn="l">
               <a:lnSpc>
                 <a:spcPct val="97600"/>
               </a:lnSpc>
@@ -6199,7 +5648,7 @@
           </a:bodyPr>
           <a:lstStyle/>
           <a:p>
-            <a:pPr algn="l" indent="0" marL="0">
+            <a:pPr marL="0" indent="0" algn="l">
               <a:lnSpc>
                 <a:spcPct val="97600"/>
               </a:lnSpc>
@@ -6243,7 +5692,7 @@
           </a:bodyPr>
           <a:lstStyle/>
           <a:p>
-            <a:pPr algn="l" indent="0" marL="0">
+            <a:pPr marL="0" indent="0" algn="l">
               <a:lnSpc>
                 <a:spcPct val="97600"/>
               </a:lnSpc>
@@ -6287,7 +5736,7 @@
           </a:bodyPr>
           <a:lstStyle/>
           <a:p>
-            <a:pPr algn="l" indent="0" marL="0">
+            <a:pPr marL="0" indent="0" algn="l">
               <a:lnSpc>
                 <a:spcPct val="100000"/>
               </a:lnSpc>
@@ -6375,7 +5824,7 @@
           </a:bodyPr>
           <a:lstStyle/>
           <a:p>
-            <a:pPr algn="l" indent="0" marL="0">
+            <a:pPr marL="0" indent="0" algn="l">
               <a:buNone/>
             </a:pPr>
             <a:r>
@@ -6388,510 +5837,6 @@
                 <a:cs typeface="Calibri" pitchFamily="34" charset="-120"/>
               </a:rPr>
               <a:t>5</a:t>
-            </a:r>
-            <a:endParaRPr lang="en-US" sz="850" dirty="0"/>
-          </a:p>
-        </p:txBody>
-      </p:sp>
-    </p:spTree>
-  </p:cSld>
-  <p:clrMapOvr>
-    <a:masterClrMapping/>
-  </p:clrMapOvr>
-</p:sld>
-</file>
-
-<file path=ppt/slides/slide6.xml><?xml version="1.0" encoding="utf-8"?>
-<p:sld xmlns:a="http://schemas.openxmlformats.org/drawingml/2006/main" xmlns:r="http://schemas.openxmlformats.org/officeDocument/2006/relationships" xmlns:p="http://schemas.openxmlformats.org/presentationml/2006/main">
-  <p:cSld name="Slide 6">
-    <p:spTree>
-      <p:nvGrpSpPr>
-        <p:cNvPr id="1" name=""/>
-        <p:cNvGrpSpPr/>
-        <p:nvPr/>
-      </p:nvGrpSpPr>
-      <p:grpSpPr>
-        <a:xfrm>
-          <a:off x="0" y="0"/>
-          <a:ext cx="0" cy="0"/>
-          <a:chOff x="0" y="0"/>
-          <a:chExt cx="0" cy="0"/>
-        </a:xfrm>
-      </p:grpSpPr>
-      <p:pic>
-        <p:nvPicPr>
-          <p:cNvPr id="2" name="Image 0" descr="preencoded.png">    </p:cNvPr>
-          <p:cNvPicPr>
-            <a:picLocks noChangeAspect="1"/>
-          </p:cNvPicPr>
-          <p:nvPr/>
-        </p:nvPicPr>
-        <p:blipFill>
-          <a:blip r:embed="rId1"/>
-          <a:stretch>
-            <a:fillRect/>
-          </a:stretch>
-        </p:blipFill>
-        <p:spPr>
-          <a:xfrm>
-            <a:off x="0" y="0"/>
-            <a:ext cx="9144000" cy="5143500"/>
-          </a:xfrm>
-          <a:prstGeom prst="rect">
-            <a:avLst/>
-          </a:prstGeom>
-        </p:spPr>
-      </p:pic>
-      <p:sp>
-        <p:nvSpPr>
-          <p:cNvPr id="3" name="Text 0"/>
-          <p:cNvSpPr/>
-          <p:nvPr/>
-        </p:nvSpPr>
-        <p:spPr>
-          <a:xfrm>
-            <a:off x="607219" y="328613"/>
-            <a:ext cx="7886700" cy="408589"/>
-          </a:xfrm>
-          <a:prstGeom prst="rect">
-            <a:avLst/>
-          </a:prstGeom>
-          <a:noFill/>
-          <a:ln/>
-        </p:spPr>
-        <p:txBody>
-          <a:bodyPr wrap="none" lIns="0" tIns="0" rIns="0" bIns="0" rtlCol="0" anchor="t">
-            <a:spAutoFit/>
-          </a:bodyPr>
-          <a:lstStyle/>
-          <a:p>
-            <a:pPr algn="l" indent="0" marL="0">
-              <a:lnSpc>
-                <a:spcPct val="83200"/>
-              </a:lnSpc>
-              <a:buNone/>
-            </a:pPr>
-            <a:r>
-              <a:rPr lang="en-US" sz="3000" dirty="0">
-                <a:solidFill>
-                  <a:srgbClr val="003A70"/>
-                </a:solidFill>
-                <a:latin typeface="Calibri Light" pitchFamily="34" charset="0"/>
-                <a:ea typeface="Calibri Light" pitchFamily="34" charset="-122"/>
-                <a:cs typeface="Calibri Light" pitchFamily="34" charset="-120"/>
-              </a:rPr>
-              <a:t>Composition unifies boundaries</a:t>
-            </a:r>
-            <a:endParaRPr lang="en-US" sz="3000" dirty="0"/>
-          </a:p>
-        </p:txBody>
-      </p:sp>
-      <p:sp>
-        <p:nvSpPr>
-          <p:cNvPr id="4" name="Text 1"/>
-          <p:cNvSpPr/>
-          <p:nvPr/>
-        </p:nvSpPr>
-        <p:spPr>
-          <a:xfrm>
-            <a:off x="607219" y="965802"/>
-            <a:ext cx="7886700" cy="321469"/>
-          </a:xfrm>
-          <a:prstGeom prst="rect">
-            <a:avLst/>
-          </a:prstGeom>
-          <a:noFill/>
-          <a:ln/>
-        </p:spPr>
-        <p:txBody>
-          <a:bodyPr wrap="square" lIns="0" tIns="0" rIns="0" bIns="0" rtlCol="0" anchor="t">
-            <a:spAutoFit/>
-          </a:bodyPr>
-          <a:lstStyle/>
-          <a:p>
-            <a:pPr algn="l" indent="0" marL="0">
-              <a:buNone/>
-            </a:pPr>
-            <a:r>
-              <a:rPr lang="en-US" sz="1650" b="1" dirty="0">
-                <a:solidFill>
-                  <a:srgbClr val="003A70"/>
-                </a:solidFill>
-                <a:latin typeface="Courier New" pitchFamily="34" charset="0"/>
-                <a:ea typeface="Courier New" pitchFamily="34" charset="-122"/>
-                <a:cs typeface="Courier New" pitchFamily="34" charset="-120"/>
-              </a:rPr>
-              <a:t>For all s ∈ S: s · Ø = Ø · s = Ø</a:t>
-            </a:r>
-            <a:endParaRPr lang="en-US" sz="1650" dirty="0"/>
-          </a:p>
-        </p:txBody>
-      </p:sp>
-      <p:sp>
-        <p:nvSpPr>
-          <p:cNvPr id="5" name="Text 2"/>
-          <p:cNvSpPr/>
-          <p:nvPr/>
-        </p:nvSpPr>
-        <p:spPr>
-          <a:xfrm>
-            <a:off x="607219" y="1508727"/>
-            <a:ext cx="7886700" cy="225028"/>
-          </a:xfrm>
-          <a:prstGeom prst="rect">
-            <a:avLst/>
-          </a:prstGeom>
-          <a:noFill/>
-          <a:ln/>
-        </p:spPr>
-        <p:txBody>
-          <a:bodyPr wrap="square" lIns="0" tIns="0" rIns="0" bIns="0" rtlCol="0" anchor="t">
-            <a:spAutoFit/>
-          </a:bodyPr>
-          <a:lstStyle/>
-          <a:p>
-            <a:pPr algn="l" indent="0" marL="0">
-              <a:buNone/>
-            </a:pPr>
-            <a:r>
-              <a:rPr lang="en-US" sz="1200" b="1" spc="1" kern="0" dirty="0">
-                <a:solidFill>
-                  <a:srgbClr val="00A3A1"/>
-                </a:solidFill>
-                <a:latin typeface="Calibri" pitchFamily="34" charset="0"/>
-                <a:ea typeface="Calibri" pitchFamily="34" charset="-122"/>
-                <a:cs typeface="Calibri" pitchFamily="34" charset="-120"/>
-              </a:rPr>
-              <a:t>FOR ALL a, b, c, d, e, f ∈ T*</a:t>
-            </a:r>
-            <a:endParaRPr lang="en-US" sz="1200" dirty="0"/>
-          </a:p>
-        </p:txBody>
-      </p:sp>
-      <p:sp>
-        <p:nvSpPr>
-          <p:cNvPr id="6" name="Text 3"/>
-          <p:cNvSpPr/>
-          <p:nvPr/>
-        </p:nvSpPr>
-        <p:spPr>
-          <a:xfrm>
-            <a:off x="607219" y="1848055"/>
-            <a:ext cx="7886700" cy="253603"/>
-          </a:xfrm>
-          <a:prstGeom prst="rect">
-            <a:avLst/>
-          </a:prstGeom>
-          <a:noFill/>
-          <a:ln/>
-        </p:spPr>
-        <p:txBody>
-          <a:bodyPr wrap="square" lIns="0" tIns="0" rIns="0" bIns="0" rtlCol="0" anchor="t">
-            <a:spAutoFit/>
-          </a:bodyPr>
-          <a:lstStyle/>
-          <a:p>
-            <a:pPr algn="l" indent="0" marL="0">
-              <a:buNone/>
-            </a:pPr>
-            <a:r>
-              <a:rPr lang="en-US" sz="1550" b="1" dirty="0">
-                <a:solidFill>
-                  <a:srgbClr val="003A70"/>
-                </a:solidFill>
-                <a:latin typeface="Courier New" pitchFamily="34" charset="0"/>
-                <a:ea typeface="Courier New" pitchFamily="34" charset="-122"/>
-                <a:cs typeface="Courier New" pitchFamily="34" charset="-120"/>
-              </a:rPr>
-              <a:t>(a → b) · (eb → d) = (ea → d)</a:t>
-            </a:r>
-            <a:endParaRPr lang="en-US" sz="1550" dirty="0"/>
-          </a:p>
-        </p:txBody>
-      </p:sp>
-      <p:sp>
-        <p:nvSpPr>
-          <p:cNvPr id="7" name="Text 4"/>
-          <p:cNvSpPr/>
-          <p:nvPr/>
-        </p:nvSpPr>
-        <p:spPr>
-          <a:xfrm>
-            <a:off x="607219" y="2194527"/>
-            <a:ext cx="7886700" cy="253603"/>
-          </a:xfrm>
-          <a:prstGeom prst="rect">
-            <a:avLst/>
-          </a:prstGeom>
-          <a:noFill/>
-          <a:ln/>
-        </p:spPr>
-        <p:txBody>
-          <a:bodyPr wrap="square" lIns="0" tIns="0" rIns="0" bIns="0" rtlCol="0" anchor="t">
-            <a:spAutoFit/>
-          </a:bodyPr>
-          <a:lstStyle/>
-          <a:p>
-            <a:pPr algn="l" indent="0" marL="0">
-              <a:buNone/>
-            </a:pPr>
-            <a:r>
-              <a:rPr lang="en-US" sz="1550" b="1" dirty="0">
-                <a:solidFill>
-                  <a:srgbClr val="003A70"/>
-                </a:solidFill>
-                <a:latin typeface="Courier New" pitchFamily="34" charset="0"/>
-                <a:ea typeface="Courier New" pitchFamily="34" charset="-122"/>
-                <a:cs typeface="Courier New" pitchFamily="34" charset="-120"/>
-              </a:rPr>
-              <a:t>(a → fc) · (c → d) = (a → fd)</a:t>
-            </a:r>
-            <a:endParaRPr lang="en-US" sz="1550" dirty="0"/>
-          </a:p>
-        </p:txBody>
-      </p:sp>
-      <p:sp>
-        <p:nvSpPr>
-          <p:cNvPr id="8" name="Text 5"/>
-          <p:cNvSpPr/>
-          <p:nvPr/>
-        </p:nvSpPr>
-        <p:spPr>
-          <a:xfrm>
-            <a:off x="607219" y="2540998"/>
-            <a:ext cx="7886700" cy="242888"/>
-          </a:xfrm>
-          <a:prstGeom prst="rect">
-            <a:avLst/>
-          </a:prstGeom>
-          <a:noFill/>
-          <a:ln/>
-        </p:spPr>
-        <p:txBody>
-          <a:bodyPr wrap="square" lIns="0" tIns="0" rIns="0" bIns="0" rtlCol="0" anchor="t">
-            <a:spAutoFit/>
-          </a:bodyPr>
-          <a:lstStyle/>
-          <a:p>
-            <a:pPr algn="l" indent="0" marL="0">
-              <a:buNone/>
-            </a:pPr>
-            <a:r>
-              <a:rPr lang="en-US" sz="1600" dirty="0">
-                <a:solidFill>
-                  <a:srgbClr val="2F2F2F"/>
-                </a:solidFill>
-                <a:latin typeface="Courier New" pitchFamily="34" charset="0"/>
-                <a:ea typeface="Courier New" pitchFamily="34" charset="-122"/>
-                <a:cs typeface="Courier New" pitchFamily="34" charset="-120"/>
-              </a:rPr>
-              <a:t>Ø, otherwise</a:t>
-            </a:r>
-            <a:endParaRPr lang="en-US" sz="1600" dirty="0"/>
-          </a:p>
-        </p:txBody>
-      </p:sp>
-      <p:sp>
-        <p:nvSpPr>
-          <p:cNvPr id="9" name="Text 6"/>
-          <p:cNvSpPr/>
-          <p:nvPr/>
-        </p:nvSpPr>
-        <p:spPr>
-          <a:xfrm>
-            <a:off x="607219" y="2962480"/>
-            <a:ext cx="7886700" cy="239595"/>
-          </a:xfrm>
-          <a:prstGeom prst="rect">
-            <a:avLst/>
-          </a:prstGeom>
-          <a:noFill/>
-          <a:ln/>
-        </p:spPr>
-        <p:txBody>
-          <a:bodyPr wrap="none" lIns="0" tIns="0" rIns="0" bIns="0" rtlCol="0" anchor="t">
-            <a:spAutoFit/>
-          </a:bodyPr>
-          <a:lstStyle/>
-          <a:p>
-            <a:pPr algn="l" indent="0" marL="0">
-              <a:lnSpc>
-                <a:spcPct val="94400"/>
-              </a:lnSpc>
-              <a:buNone/>
-            </a:pPr>
-            <a:r>
-              <a:rPr lang="en-US" sz="1400" b="1" dirty="0">
-                <a:solidFill>
-                  <a:srgbClr val="003A70"/>
-                </a:solidFill>
-                <a:latin typeface="Courier New" pitchFamily="34" charset="0"/>
-                <a:ea typeface="Courier New" pitchFamily="34" charset="-122"/>
-                <a:cs typeface="Courier New" pitchFamily="34" charset="-120"/>
-              </a:rPr>
-              <a:t>Ø</a:t>
-            </a:r>
-            <a:r>
-              <a:rPr lang="en-US" sz="1500" dirty="0">
-                <a:solidFill>
-                  <a:srgbClr val="2F2F2F"/>
-                </a:solidFill>
-                <a:latin typeface="Calibri" pitchFamily="34" charset="0"/>
-                <a:ea typeface="Calibri" pitchFamily="34" charset="-122"/>
-                <a:cs typeface="Calibri" pitchFamily="34" charset="-120"/>
-              </a:rPr>
-              <a:t> is zero.</a:t>
-            </a:r>
-            <a:endParaRPr lang="en-US" sz="1400" dirty="0"/>
-          </a:p>
-        </p:txBody>
-      </p:sp>
-      <p:sp>
-        <p:nvSpPr>
-          <p:cNvPr id="10" name="Text 7"/>
-          <p:cNvSpPr/>
-          <p:nvPr/>
-        </p:nvSpPr>
-        <p:spPr>
-          <a:xfrm>
-            <a:off x="607219" y="3252081"/>
-            <a:ext cx="7886700" cy="239595"/>
-          </a:xfrm>
-          <a:prstGeom prst="rect">
-            <a:avLst/>
-          </a:prstGeom>
-          <a:noFill/>
-          <a:ln/>
-        </p:spPr>
-        <p:txBody>
-          <a:bodyPr wrap="none" lIns="0" tIns="0" rIns="0" bIns="0" rtlCol="0" anchor="t">
-            <a:spAutoFit/>
-          </a:bodyPr>
-          <a:lstStyle/>
-          <a:p>
-            <a:pPr algn="l" indent="0" marL="0">
-              <a:lnSpc>
-                <a:spcPct val="94400"/>
-              </a:lnSpc>
-              <a:buNone/>
-            </a:pPr>
-            <a:r>
-              <a:rPr lang="en-US" sz="1400" b="1" dirty="0">
-                <a:solidFill>
-                  <a:srgbClr val="003A70"/>
-                </a:solidFill>
-                <a:latin typeface="Courier New" pitchFamily="34" charset="0"/>
-                <a:ea typeface="Courier New" pitchFamily="34" charset="-122"/>
-                <a:cs typeface="Courier New" pitchFamily="34" charset="-120"/>
-              </a:rPr>
-              <a:t>1 = ( → )</a:t>
-            </a:r>
-            <a:r>
-              <a:rPr lang="en-US" sz="1500" dirty="0">
-                <a:solidFill>
-                  <a:srgbClr val="2F2F2F"/>
-                </a:solidFill>
-                <a:latin typeface="Calibri" pitchFamily="34" charset="0"/>
-                <a:ea typeface="Calibri" pitchFamily="34" charset="-122"/>
-                <a:cs typeface="Calibri" pitchFamily="34" charset="-120"/>
-              </a:rPr>
-              <a:t> is the unity for composition.</a:t>
-            </a:r>
-            <a:endParaRPr lang="en-US" sz="1400" dirty="0"/>
-          </a:p>
-        </p:txBody>
-      </p:sp>
-      <p:sp>
-        <p:nvSpPr>
-          <p:cNvPr id="11" name="Text 8"/>
-          <p:cNvSpPr/>
-          <p:nvPr/>
-        </p:nvSpPr>
-        <p:spPr>
-          <a:xfrm>
-            <a:off x="607219" y="3541681"/>
-            <a:ext cx="7886700" cy="239595"/>
-          </a:xfrm>
-          <a:prstGeom prst="rect">
-            <a:avLst/>
-          </a:prstGeom>
-          <a:noFill/>
-          <a:ln/>
-        </p:spPr>
-        <p:txBody>
-          <a:bodyPr wrap="none" lIns="0" tIns="0" rIns="0" bIns="0" rtlCol="0" anchor="t">
-            <a:spAutoFit/>
-          </a:bodyPr>
-          <a:lstStyle/>
-          <a:p>
-            <a:pPr algn="l" indent="0" marL="0">
-              <a:lnSpc>
-                <a:spcPct val="94400"/>
-              </a:lnSpc>
-              <a:buNone/>
-            </a:pPr>
-            <a:r>
-              <a:rPr lang="en-US" sz="1400" b="1" dirty="0">
-                <a:solidFill>
-                  <a:srgbClr val="003A70"/>
-                </a:solidFill>
-                <a:latin typeface="Courier New" pitchFamily="34" charset="0"/>
-                <a:ea typeface="Courier New" pitchFamily="34" charset="-122"/>
-                <a:cs typeface="Courier New" pitchFamily="34" charset="-120"/>
-              </a:rPr>
-              <a:t>S</a:t>
-            </a:r>
-            <a:r>
-              <a:rPr lang="en-US" sz="1500" dirty="0">
-                <a:solidFill>
-                  <a:srgbClr val="2F2F2F"/>
-                </a:solidFill>
-                <a:latin typeface="Calibri" pitchFamily="34" charset="0"/>
-                <a:ea typeface="Calibri" pitchFamily="34" charset="-122"/>
-                <a:cs typeface="Calibri" pitchFamily="34" charset="-120"/>
-              </a:rPr>
-              <a:t> is a polycyclic monoid.</a:t>
-            </a:r>
-            <a:endParaRPr lang="en-US" sz="1400" dirty="0"/>
-          </a:p>
-        </p:txBody>
-      </p:sp>
-      <p:sp>
-        <p:nvSpPr>
-          <p:cNvPr id="12" name="Text 9"/>
-          <p:cNvSpPr/>
-          <p:nvPr/>
-        </p:nvSpPr>
-        <p:spPr>
-          <a:xfrm>
-            <a:off x="8435987" y="4997053"/>
-            <a:ext cx="57931" cy="139303"/>
-          </a:xfrm>
-          <a:prstGeom prst="rect">
-            <a:avLst/>
-          </a:prstGeom>
-          <a:noFill/>
-          <a:ln/>
-        </p:spPr>
-        <p:txBody>
-          <a:bodyPr wrap="none" lIns="0" tIns="0" rIns="0" bIns="0" rtlCol="0" anchor="t">
-            <a:spAutoFit/>
-          </a:bodyPr>
-          <a:lstStyle/>
-          <a:p>
-            <a:pPr algn="l" indent="0" marL="0">
-              <a:buNone/>
-            </a:pPr>
-            <a:r>
-              <a:rPr lang="en-US" sz="850" dirty="0">
-                <a:solidFill>
-                  <a:srgbClr val="888888"/>
-                </a:solidFill>
-                <a:latin typeface="Calibri" pitchFamily="34" charset="0"/>
-                <a:ea typeface="Calibri" pitchFamily="34" charset="-122"/>
-                <a:cs typeface="Calibri" pitchFamily="34" charset="-120"/>
-              </a:rPr>
-              <a:t>6</a:t>
             </a:r>
             <a:endParaRPr lang="en-US" sz="850" dirty="0"/>
           </a:p>
@@ -6924,14 +5869,14 @@
       </p:grpSpPr>
       <p:pic>
         <p:nvPicPr>
-          <p:cNvPr id="2" name="Image 0" descr="preencoded.png">    </p:cNvPr>
+          <p:cNvPr id="2" name="Image 0" descr="preencoded.png"/>
           <p:cNvPicPr>
             <a:picLocks noChangeAspect="1"/>
           </p:cNvPicPr>
           <p:nvPr/>
         </p:nvPicPr>
         <p:blipFill>
-          <a:blip r:embed="rId1"/>
+          <a:blip r:embed="rId3"/>
           <a:stretch>
             <a:fillRect/>
           </a:stretch>
@@ -6969,7 +5914,7 @@
           </a:bodyPr>
           <a:lstStyle/>
           <a:p>
-            <a:pPr algn="l" indent="0" marL="0">
+            <a:pPr marL="0" indent="0" algn="l">
               <a:lnSpc>
                 <a:spcPct val="83200"/>
               </a:lnSpc>
@@ -7013,11 +5958,11 @@
           </a:bodyPr>
           <a:lstStyle/>
           <a:p>
-            <a:pPr algn="l" indent="0" marL="0">
-              <a:buNone/>
-            </a:pPr>
-            <a:r>
-              <a:rPr lang="en-US" sz="950" b="1" spc="1" kern="0" dirty="0">
+            <a:pPr marL="0" indent="0" algn="l">
+              <a:buNone/>
+            </a:pPr>
+            <a:r>
+              <a:rPr lang="en-US" sz="950" b="1" kern="0" spc="1" dirty="0">
                 <a:solidFill>
                   <a:srgbClr val="00A3A1"/>
                 </a:solidFill>
@@ -7054,7 +5999,7 @@
           </a:bodyPr>
           <a:lstStyle/>
           <a:p>
-            <a:pPr algn="l" indent="0" marL="0">
+            <a:pPr marL="0" indent="0" algn="l">
               <a:lnSpc>
                 <a:spcPct val="93600"/>
               </a:lnSpc>
@@ -7098,7 +6043,7 @@
           </a:bodyPr>
           <a:lstStyle/>
           <a:p>
-            <a:pPr algn="l" indent="0" marL="0">
+            <a:pPr marL="0" indent="0" algn="l">
               <a:lnSpc>
                 <a:spcPct val="93600"/>
               </a:lnSpc>
@@ -7142,7 +6087,7 @@
           </a:bodyPr>
           <a:lstStyle/>
           <a:p>
-            <a:pPr algn="l" indent="0" marL="0">
+            <a:pPr marL="0" indent="0" algn="l">
               <a:lnSpc>
                 <a:spcPct val="93600"/>
               </a:lnSpc>
@@ -7186,11 +6131,11 @@
           </a:bodyPr>
           <a:lstStyle/>
           <a:p>
-            <a:pPr algn="l" indent="0" marL="0">
-              <a:buNone/>
-            </a:pPr>
-            <a:r>
-              <a:rPr lang="en-US" sz="950" b="1" spc="1" kern="0" dirty="0">
+            <a:pPr marL="0" indent="0" algn="l">
+              <a:buNone/>
+            </a:pPr>
+            <a:r>
+              <a:rPr lang="en-US" sz="950" b="1" kern="0" spc="1" dirty="0">
                 <a:solidFill>
                   <a:srgbClr val="00A3A1"/>
                 </a:solidFill>
@@ -7227,7 +6172,7 @@
           </a:bodyPr>
           <a:lstStyle/>
           <a:p>
-            <a:pPr algn="l" indent="0" marL="0">
+            <a:pPr marL="0" indent="0" algn="l">
               <a:lnSpc>
                 <a:spcPct val="93600"/>
               </a:lnSpc>
@@ -7271,7 +6216,7 @@
           </a:bodyPr>
           <a:lstStyle/>
           <a:p>
-            <a:pPr algn="l" indent="0" marL="0">
+            <a:pPr marL="0" indent="0" algn="l">
               <a:lnSpc>
                 <a:spcPct val="93600"/>
               </a:lnSpc>
@@ -7315,7 +6260,7 @@
           </a:bodyPr>
           <a:lstStyle/>
           <a:p>
-            <a:pPr algn="l" indent="0" marL="0">
+            <a:pPr marL="0" indent="0" algn="l">
               <a:lnSpc>
                 <a:spcPct val="93600"/>
               </a:lnSpc>
@@ -7359,7 +6304,7 @@
           </a:bodyPr>
           <a:lstStyle/>
           <a:p>
-            <a:pPr algn="l" indent="0" marL="0">
+            <a:pPr marL="0" indent="0" algn="l">
               <a:lnSpc>
                 <a:spcPct val="93600"/>
               </a:lnSpc>
@@ -7403,7 +6348,7 @@
           </a:bodyPr>
           <a:lstStyle/>
           <a:p>
-            <a:pPr algn="l" indent="0" marL="0">
+            <a:pPr marL="0" indent="0" algn="l">
               <a:lnSpc>
                 <a:spcPct val="93600"/>
               </a:lnSpc>
@@ -7447,7 +6392,7 @@
           </a:bodyPr>
           <a:lstStyle/>
           <a:p>
-            <a:pPr algn="l" indent="0" marL="0">
+            <a:pPr marL="0" indent="0" algn="l">
               <a:lnSpc>
                 <a:spcPct val="97600"/>
               </a:lnSpc>
@@ -7513,7 +6458,7 @@
           </a:bodyPr>
           <a:lstStyle/>
           <a:p>
-            <a:pPr algn="l" indent="0" marL="0">
+            <a:pPr marL="0" indent="0" algn="l">
               <a:buNone/>
             </a:pPr>
             <a:r>
@@ -7540,357 +6485,6 @@
 </file>
 
 <file path=ppt/slides/slide8.xml><?xml version="1.0" encoding="utf-8"?>
-<p:sld xmlns:a="http://schemas.openxmlformats.org/drawingml/2006/main" xmlns:r="http://schemas.openxmlformats.org/officeDocument/2006/relationships" xmlns:p="http://schemas.openxmlformats.org/presentationml/2006/main">
-  <p:cSld name="Slide 8">
-    <p:spTree>
-      <p:nvGrpSpPr>
-        <p:cNvPr id="1" name=""/>
-        <p:cNvGrpSpPr/>
-        <p:nvPr/>
-      </p:nvGrpSpPr>
-      <p:grpSpPr>
-        <a:xfrm>
-          <a:off x="0" y="0"/>
-          <a:ext cx="0" cy="0"/>
-          <a:chOff x="0" y="0"/>
-          <a:chExt cx="0" cy="0"/>
-        </a:xfrm>
-      </p:grpSpPr>
-      <p:pic>
-        <p:nvPicPr>
-          <p:cNvPr id="2" name="Image 0" descr="preencoded.png">    </p:cNvPr>
-          <p:cNvPicPr>
-            <a:picLocks noChangeAspect="1"/>
-          </p:cNvPicPr>
-          <p:nvPr/>
-        </p:nvPicPr>
-        <p:blipFill>
-          <a:blip r:embed="rId1"/>
-          <a:stretch>
-            <a:fillRect/>
-          </a:stretch>
-        </p:blipFill>
-        <p:spPr>
-          <a:xfrm>
-            <a:off x="0" y="0"/>
-            <a:ext cx="9144000" cy="5143500"/>
-          </a:xfrm>
-          <a:prstGeom prst="rect">
-            <a:avLst/>
-          </a:prstGeom>
-        </p:spPr>
-      </p:pic>
-      <p:sp>
-        <p:nvSpPr>
-          <p:cNvPr id="3" name="Text 0"/>
-          <p:cNvSpPr/>
-          <p:nvPr/>
-        </p:nvSpPr>
-        <p:spPr>
-          <a:xfrm>
-            <a:off x="607219" y="350044"/>
-            <a:ext cx="7886700" cy="416012"/>
-          </a:xfrm>
-          <a:prstGeom prst="rect">
-            <a:avLst/>
-          </a:prstGeom>
-          <a:noFill/>
-          <a:ln/>
-        </p:spPr>
-        <p:txBody>
-          <a:bodyPr wrap="none" lIns="0" tIns="0" rIns="0" bIns="0" rtlCol="0" anchor="t">
-            <a:spAutoFit/>
-          </a:bodyPr>
-          <a:lstStyle/>
-          <a:p>
-            <a:pPr algn="l" indent="0" marL="0">
-              <a:lnSpc>
-                <a:spcPct val="83200"/>
-              </a:lnSpc>
-              <a:buNone/>
-            </a:pPr>
-            <a:r>
-              <a:rPr lang="en-US" sz="3050" dirty="0">
-                <a:solidFill>
-                  <a:srgbClr val="003A70"/>
-                </a:solidFill>
-                <a:latin typeface="Calibri Light" pitchFamily="34" charset="0"/>
-                <a:ea typeface="Calibri Light" pitchFamily="34" charset="-122"/>
-                <a:cs typeface="Calibri Light" pitchFamily="34" charset="-120"/>
-              </a:rPr>
-              <a:t>Example: requirements flow backward</a:t>
-            </a:r>
-            <a:endParaRPr lang="en-US" sz="3050" dirty="0"/>
-          </a:p>
-        </p:txBody>
-      </p:sp>
-      <p:sp>
-        <p:nvSpPr>
-          <p:cNvPr id="4" name="Text 1"/>
-          <p:cNvSpPr/>
-          <p:nvPr/>
-        </p:nvSpPr>
-        <p:spPr>
-          <a:xfrm>
-            <a:off x="607219" y="1116099"/>
-            <a:ext cx="7886700" cy="175022"/>
-          </a:xfrm>
-          <a:prstGeom prst="rect">
-            <a:avLst/>
-          </a:prstGeom>
-          <a:noFill/>
-          <a:ln/>
-        </p:spPr>
-        <p:txBody>
-          <a:bodyPr wrap="square" lIns="0" tIns="0" rIns="0" bIns="0" rtlCol="0" anchor="t">
-            <a:spAutoFit/>
-          </a:bodyPr>
-          <a:lstStyle/>
-          <a:p>
-            <a:pPr algn="l" indent="0" marL="0">
-              <a:buNone/>
-            </a:pPr>
-            <a:r>
-              <a:rPr lang="en-US" sz="1000" b="1" spc="1" kern="0" dirty="0">
-                <a:solidFill>
-                  <a:srgbClr val="00A3A1"/>
-                </a:solidFill>
-                <a:latin typeface="Calibri" pitchFamily="34" charset="0"/>
-                <a:ea typeface="Calibri" pitchFamily="34" charset="-122"/>
-                <a:cs typeface="Calibri" pitchFamily="34" charset="-120"/>
-              </a:rPr>
-              <a:t>INDEXED WILDCARDS PRESERVE VALUE FLOW</a:t>
-            </a:r>
-            <a:endParaRPr lang="en-US" sz="1000" dirty="0"/>
-          </a:p>
-        </p:txBody>
-      </p:sp>
-      <p:sp>
-        <p:nvSpPr>
-          <p:cNvPr id="5" name="Text 2"/>
-          <p:cNvSpPr/>
-          <p:nvPr/>
-        </p:nvSpPr>
-        <p:spPr>
-          <a:xfrm>
-            <a:off x="607219" y="1448284"/>
-            <a:ext cx="7886700" cy="291443"/>
-          </a:xfrm>
-          <a:prstGeom prst="rect">
-            <a:avLst/>
-          </a:prstGeom>
-          <a:noFill/>
-          <a:ln/>
-        </p:spPr>
-        <p:txBody>
-          <a:bodyPr wrap="none" lIns="0" tIns="0" rIns="0" bIns="0" rtlCol="0" anchor="t">
-            <a:spAutoFit/>
-          </a:bodyPr>
-          <a:lstStyle/>
-          <a:p>
-            <a:pPr algn="l" indent="0" marL="0">
-              <a:lnSpc>
-                <a:spcPct val="96000"/>
-              </a:lnSpc>
-              <a:buNone/>
-            </a:pPr>
-            <a:r>
-              <a:rPr lang="en-US" sz="1700" b="1" dirty="0">
-                <a:solidFill>
-                  <a:srgbClr val="003A70"/>
-                </a:solidFill>
-                <a:latin typeface="Courier New" pitchFamily="34" charset="0"/>
-                <a:ea typeface="Courier New" pitchFamily="34" charset="-122"/>
-                <a:cs typeface="Courier New" pitchFamily="34" charset="-120"/>
-              </a:rPr>
-              <a:t>SWAP ( x[2] x[1] -- x[1] x[2] )</a:t>
-            </a:r>
-            <a:endParaRPr lang="en-US" sz="1700" dirty="0"/>
-          </a:p>
-        </p:txBody>
-      </p:sp>
-      <p:sp>
-        <p:nvSpPr>
-          <p:cNvPr id="6" name="Text 3"/>
-          <p:cNvSpPr/>
-          <p:nvPr/>
-        </p:nvSpPr>
-        <p:spPr>
-          <a:xfrm>
-            <a:off x="607219" y="1918320"/>
-            <a:ext cx="7886700" cy="291443"/>
-          </a:xfrm>
-          <a:prstGeom prst="rect">
-            <a:avLst/>
-          </a:prstGeom>
-          <a:noFill/>
-          <a:ln/>
-        </p:spPr>
-        <p:txBody>
-          <a:bodyPr wrap="none" lIns="0" tIns="0" rIns="0" bIns="0" rtlCol="0" anchor="t">
-            <a:spAutoFit/>
-          </a:bodyPr>
-          <a:lstStyle/>
-          <a:p>
-            <a:pPr algn="l" indent="0" marL="0">
-              <a:lnSpc>
-                <a:spcPct val="96000"/>
-              </a:lnSpc>
-              <a:buNone/>
-            </a:pPr>
-            <a:r>
-              <a:rPr lang="en-US" sz="1700" b="1" dirty="0">
-                <a:solidFill>
-                  <a:srgbClr val="003A70"/>
-                </a:solidFill>
-                <a:latin typeface="Courier New" pitchFamily="34" charset="0"/>
-                <a:ea typeface="Courier New" pitchFamily="34" charset="-122"/>
-                <a:cs typeface="Courier New" pitchFamily="34" charset="-120"/>
-              </a:rPr>
-              <a:t>OVER ( x[2] x[1] -- x[2] x[1] x[2] )</a:t>
-            </a:r>
-            <a:endParaRPr lang="en-US" sz="1700" dirty="0"/>
-          </a:p>
-        </p:txBody>
-      </p:sp>
-      <p:sp>
-        <p:nvSpPr>
-          <p:cNvPr id="7" name="Text 4"/>
-          <p:cNvSpPr/>
-          <p:nvPr/>
-        </p:nvSpPr>
-        <p:spPr>
-          <a:xfrm>
-            <a:off x="607219" y="2388357"/>
-            <a:ext cx="7886700" cy="291443"/>
-          </a:xfrm>
-          <a:prstGeom prst="rect">
-            <a:avLst/>
-          </a:prstGeom>
-          <a:noFill/>
-          <a:ln/>
-        </p:spPr>
-        <p:txBody>
-          <a:bodyPr wrap="none" lIns="0" tIns="0" rIns="0" bIns="0" rtlCol="0" anchor="t">
-            <a:spAutoFit/>
-          </a:bodyPr>
-          <a:lstStyle/>
-          <a:p>
-            <a:pPr algn="l" indent="0" marL="0">
-              <a:lnSpc>
-                <a:spcPct val="96000"/>
-              </a:lnSpc>
-              <a:buNone/>
-            </a:pPr>
-            <a:r>
-              <a:rPr lang="en-US" sz="1700" b="1" dirty="0">
-                <a:solidFill>
-                  <a:srgbClr val="003A70"/>
-                </a:solidFill>
-                <a:latin typeface="Courier New" pitchFamily="34" charset="0"/>
-                <a:ea typeface="Courier New" pitchFamily="34" charset="-122"/>
-                <a:cs typeface="Courier New" pitchFamily="34" charset="-120"/>
-              </a:rPr>
-              <a:t>DUP ( x[1] -- x[1] x[1] )</a:t>
-            </a:r>
-            <a:endParaRPr lang="en-US" sz="1700" dirty="0"/>
-          </a:p>
-        </p:txBody>
-      </p:sp>
-      <p:sp>
-        <p:nvSpPr>
-          <p:cNvPr id="8" name="Text 5"/>
-          <p:cNvSpPr/>
-          <p:nvPr/>
-        </p:nvSpPr>
-        <p:spPr>
-          <a:xfrm>
-            <a:off x="607219" y="3079849"/>
-            <a:ext cx="7500938" cy="603424"/>
-          </a:xfrm>
-          <a:prstGeom prst="rect">
-            <a:avLst/>
-          </a:prstGeom>
-          <a:noFill/>
-          <a:ln/>
-        </p:spPr>
-        <p:txBody>
-          <a:bodyPr wrap="square" lIns="0" tIns="0" rIns="0" bIns="0" rtlCol="0" anchor="t">
-            <a:spAutoFit/>
-          </a:bodyPr>
-          <a:lstStyle/>
-          <a:p>
-            <a:pPr algn="l" indent="0" marL="0">
-              <a:lnSpc>
-                <a:spcPct val="102400"/>
-              </a:lnSpc>
-              <a:buNone/>
-            </a:pPr>
-            <a:r>
-              <a:rPr lang="en-US" sz="1750" dirty="0">
-                <a:solidFill>
-                  <a:srgbClr val="2F2F2F"/>
-                </a:solidFill>
-                <a:latin typeface="Calibri" pitchFamily="34" charset="0"/>
-                <a:ea typeface="Calibri" pitchFamily="34" charset="-122"/>
-                <a:cs typeface="Calibri" pitchFamily="34" charset="-120"/>
-              </a:rPr>
-              <a:t>The same positive index denotes the same symbolic cell. Subsequent constraints on one occurrence apply to every occurrence of that value.</a:t>
-            </a:r>
-            <a:endParaRPr lang="en-US" sz="1750" dirty="0"/>
-          </a:p>
-        </p:txBody>
-      </p:sp>
-      <p:sp>
-        <p:nvSpPr>
-          <p:cNvPr id="9" name="Text 6"/>
-          <p:cNvSpPr/>
-          <p:nvPr/>
-        </p:nvSpPr>
-        <p:spPr>
-          <a:xfrm>
-            <a:off x="8435987" y="4997053"/>
-            <a:ext cx="57931" cy="139303"/>
-          </a:xfrm>
-          <a:prstGeom prst="rect">
-            <a:avLst/>
-          </a:prstGeom>
-          <a:noFill/>
-          <a:ln/>
-        </p:spPr>
-        <p:txBody>
-          <a:bodyPr wrap="none" lIns="0" tIns="0" rIns="0" bIns="0" rtlCol="0" anchor="t">
-            <a:spAutoFit/>
-          </a:bodyPr>
-          <a:lstStyle/>
-          <a:p>
-            <a:pPr algn="l" indent="0" marL="0">
-              <a:buNone/>
-            </a:pPr>
-            <a:r>
-              <a:rPr lang="en-US" sz="850" dirty="0">
-                <a:solidFill>
-                  <a:srgbClr val="888888"/>
-                </a:solidFill>
-                <a:latin typeface="Calibri" pitchFamily="34" charset="0"/>
-                <a:ea typeface="Calibri" pitchFamily="34" charset="-122"/>
-                <a:cs typeface="Calibri" pitchFamily="34" charset="-120"/>
-              </a:rPr>
-              <a:t>8</a:t>
-            </a:r>
-            <a:endParaRPr lang="en-US" sz="850" dirty="0"/>
-          </a:p>
-        </p:txBody>
-      </p:sp>
-    </p:spTree>
-  </p:cSld>
-  <p:clrMapOvr>
-    <a:masterClrMapping/>
-  </p:clrMapOvr>
-</p:sld>
-</file>
-
-<file path=ppt/slides/slide9.xml><?xml version="1.0" encoding="utf-8"?>
 <p:sld xmlns:a="http://schemas.openxmlformats.org/drawingml/2006/main" xmlns:r="http://schemas.openxmlformats.org/officeDocument/2006/relationships" xmlns:p="http://schemas.openxmlformats.org/presentationml/2006/main">
   <p:cSld name="Slide 9">
     <p:spTree>
@@ -7909,14 +6503,14 @@
       </p:grpSpPr>
       <p:pic>
         <p:nvPicPr>
-          <p:cNvPr id="2" name="Image 0" descr="preencoded.png">    </p:cNvPr>
+          <p:cNvPr id="2" name="Image 0" descr="preencoded.png"/>
           <p:cNvPicPr>
             <a:picLocks noChangeAspect="1"/>
           </p:cNvPicPr>
           <p:nvPr/>
         </p:nvPicPr>
         <p:blipFill>
-          <a:blip r:embed="rId1"/>
+          <a:blip r:embed="rId3"/>
           <a:stretch>
             <a:fillRect/>
           </a:stretch>
@@ -7954,7 +6548,7 @@
           </a:bodyPr>
           <a:lstStyle/>
           <a:p>
-            <a:pPr algn="l" indent="0" marL="0">
+            <a:pPr marL="0" indent="0" algn="l">
               <a:lnSpc>
                 <a:spcPct val="83200"/>
               </a:lnSpc>
@@ -7998,11 +6592,11 @@
           </a:bodyPr>
           <a:lstStyle/>
           <a:p>
-            <a:pPr algn="l" indent="0" marL="0">
-              <a:buNone/>
-            </a:pPr>
-            <a:r>
-              <a:rPr lang="en-US" sz="900" b="1" spc="1" kern="0" dirty="0">
+            <a:pPr marL="0" indent="0" algn="l">
+              <a:buNone/>
+            </a:pPr>
+            <a:r>
+              <a:rPr lang="en-US" sz="900" b="1" kern="0" spc="1" dirty="0">
                 <a:solidFill>
                   <a:srgbClr val="00A3A1"/>
                 </a:solidFill>
@@ -8039,7 +6633,7 @@
           </a:bodyPr>
           <a:lstStyle/>
           <a:p>
-            <a:pPr algn="l" indent="0" marL="0">
+            <a:pPr marL="0" indent="0" algn="l">
               <a:lnSpc>
                 <a:spcPct val="94400"/>
               </a:lnSpc>
@@ -8083,7 +6677,7 @@
           </a:bodyPr>
           <a:lstStyle/>
           <a:p>
-            <a:pPr algn="l" indent="0" marL="0">
+            <a:pPr marL="0" indent="0" algn="l">
               <a:lnSpc>
                 <a:spcPct val="94400"/>
               </a:lnSpc>
@@ -8127,7 +6721,7 @@
           </a:bodyPr>
           <a:lstStyle/>
           <a:p>
-            <a:pPr algn="l" indent="0" marL="0">
+            <a:pPr marL="0" indent="0" algn="l">
               <a:lnSpc>
                 <a:spcPct val="94400"/>
               </a:lnSpc>
@@ -8171,7 +6765,7 @@
           </a:bodyPr>
           <a:lstStyle/>
           <a:p>
-            <a:pPr algn="l" indent="0" marL="0">
+            <a:pPr marL="0" indent="0" algn="l">
               <a:lnSpc>
                 <a:spcPct val="97600"/>
               </a:lnSpc>
@@ -8215,11 +6809,11 @@
           </a:bodyPr>
           <a:lstStyle/>
           <a:p>
-            <a:pPr algn="l" indent="0" marL="0">
-              <a:buNone/>
-            </a:pPr>
-            <a:r>
-              <a:rPr lang="en-US" sz="850" b="1" spc="1" kern="0" dirty="0">
+            <a:pPr marL="0" indent="0" algn="l">
+              <a:buNone/>
+            </a:pPr>
+            <a:r>
+              <a:rPr lang="en-US" sz="850" b="1" kern="0" spc="1" dirty="0">
                 <a:solidFill>
                   <a:srgbClr val="00A3A1"/>
                 </a:solidFill>
@@ -8256,7 +6850,7 @@
           </a:bodyPr>
           <a:lstStyle/>
           <a:p>
-            <a:pPr algn="l" indent="0" marL="0">
+            <a:pPr marL="0" indent="0" algn="l">
               <a:lnSpc>
                 <a:spcPct val="89600"/>
               </a:lnSpc>
@@ -8300,7 +6894,7 @@
           </a:bodyPr>
           <a:lstStyle/>
           <a:p>
-            <a:pPr algn="l" indent="0" marL="0">
+            <a:pPr marL="0" indent="0" algn="l">
               <a:lnSpc>
                 <a:spcPct val="89600"/>
               </a:lnSpc>
@@ -8344,7 +6938,7 @@
           </a:bodyPr>
           <a:lstStyle/>
           <a:p>
-            <a:pPr algn="l" indent="0" marL="0">
+            <a:pPr marL="0" indent="0" algn="l">
               <a:lnSpc>
                 <a:spcPct val="89600"/>
               </a:lnSpc>
@@ -8388,7 +6982,7 @@
           </a:bodyPr>
           <a:lstStyle/>
           <a:p>
-            <a:pPr algn="l" indent="0" marL="0">
+            <a:pPr marL="0" indent="0" algn="l">
               <a:lnSpc>
                 <a:spcPct val="89600"/>
               </a:lnSpc>
@@ -8432,7 +7026,7 @@
           </a:bodyPr>
           <a:lstStyle/>
           <a:p>
-            <a:pPr algn="l" indent="0" marL="0">
+            <a:pPr marL="0" indent="0" algn="l">
               <a:lnSpc>
                 <a:spcPct val="89600"/>
               </a:lnSpc>
@@ -8476,7 +7070,7 @@
           </a:bodyPr>
           <a:lstStyle/>
           <a:p>
-            <a:pPr algn="l" indent="0" marL="0">
+            <a:pPr marL="0" indent="0" algn="l">
               <a:lnSpc>
                 <a:spcPct val="89600"/>
               </a:lnSpc>
@@ -8520,7 +7114,7 @@
           </a:bodyPr>
           <a:lstStyle/>
           <a:p>
-            <a:pPr algn="l" indent="0" marL="0">
+            <a:pPr marL="0" indent="0" algn="l">
               <a:lnSpc>
                 <a:spcPct val="92000"/>
               </a:lnSpc>
@@ -8564,7 +7158,7 @@
           </a:bodyPr>
           <a:lstStyle/>
           <a:p>
-            <a:pPr algn="l" indent="0" marL="0">
+            <a:pPr marL="0" indent="0" algn="l">
               <a:buNone/>
             </a:pPr>
             <a:r>
@@ -8577,6 +7171,703 @@
                 <a:cs typeface="Calibri" pitchFamily="34" charset="-120"/>
               </a:rPr>
               <a:t>9</a:t>
+            </a:r>
+            <a:endParaRPr lang="en-US" sz="850" dirty="0"/>
+          </a:p>
+        </p:txBody>
+      </p:sp>
+    </p:spTree>
+  </p:cSld>
+  <p:clrMapOvr>
+    <a:masterClrMapping/>
+  </p:clrMapOvr>
+</p:sld>
+</file>
+
+<file path=ppt/slides/slide9.xml><?xml version="1.0" encoding="utf-8"?>
+<p:sld xmlns:a="http://schemas.openxmlformats.org/drawingml/2006/main" xmlns:r="http://schemas.openxmlformats.org/officeDocument/2006/relationships" xmlns:p="http://schemas.openxmlformats.org/presentationml/2006/main">
+  <p:cSld name="Slide 10">
+    <p:spTree>
+      <p:nvGrpSpPr>
+        <p:cNvPr id="1" name=""/>
+        <p:cNvGrpSpPr/>
+        <p:nvPr/>
+      </p:nvGrpSpPr>
+      <p:grpSpPr>
+        <a:xfrm>
+          <a:off x="0" y="0"/>
+          <a:ext cx="0" cy="0"/>
+          <a:chOff x="0" y="0"/>
+          <a:chExt cx="0" cy="0"/>
+        </a:xfrm>
+      </p:grpSpPr>
+      <p:pic>
+        <p:nvPicPr>
+          <p:cNvPr id="2" name="Image 0" descr="preencoded.png"/>
+          <p:cNvPicPr>
+            <a:picLocks noChangeAspect="1"/>
+          </p:cNvPicPr>
+          <p:nvPr/>
+        </p:nvPicPr>
+        <p:blipFill>
+          <a:blip r:embed="rId3"/>
+          <a:stretch>
+            <a:fillRect/>
+          </a:stretch>
+        </p:blipFill>
+        <p:spPr>
+          <a:xfrm>
+            <a:off x="0" y="0"/>
+            <a:ext cx="9144000" cy="5143500"/>
+          </a:xfrm>
+          <a:prstGeom prst="rect">
+            <a:avLst/>
+          </a:prstGeom>
+        </p:spPr>
+      </p:pic>
+      <p:sp>
+        <p:nvSpPr>
+          <p:cNvPr id="3" name="Text 0"/>
+          <p:cNvSpPr/>
+          <p:nvPr/>
+        </p:nvSpPr>
+        <p:spPr>
+          <a:xfrm>
+            <a:off x="607219" y="307181"/>
+            <a:ext cx="7886700" cy="386321"/>
+          </a:xfrm>
+          <a:prstGeom prst="rect">
+            <a:avLst/>
+          </a:prstGeom>
+          <a:noFill/>
+          <a:ln/>
+        </p:spPr>
+        <p:txBody>
+          <a:bodyPr wrap="none" lIns="0" tIns="0" rIns="0" bIns="0" rtlCol="0" anchor="t">
+            <a:spAutoFit/>
+          </a:bodyPr>
+          <a:lstStyle/>
+          <a:p>
+            <a:pPr marL="0" indent="0" algn="l">
+              <a:lnSpc>
+                <a:spcPct val="83200"/>
+              </a:lnSpc>
+              <a:buNone/>
+            </a:pPr>
+            <a:r>
+              <a:rPr lang="en-US" sz="2800" dirty="0">
+                <a:solidFill>
+                  <a:srgbClr val="003A70"/>
+                </a:solidFill>
+                <a:latin typeface="Calibri Light" pitchFamily="34" charset="0"/>
+                <a:ea typeface="Calibri Light" pitchFamily="34" charset="-122"/>
+                <a:cs typeface="Calibri Light" pitchFamily="34" charset="-120"/>
+              </a:rPr>
+              <a:t>Loops use a one-versus-two test</a:t>
+            </a:r>
+            <a:endParaRPr lang="en-US" sz="2800" dirty="0"/>
+          </a:p>
+        </p:txBody>
+      </p:sp>
+      <p:sp>
+        <p:nvSpPr>
+          <p:cNvPr id="4" name="Text 1"/>
+          <p:cNvSpPr/>
+          <p:nvPr/>
+        </p:nvSpPr>
+        <p:spPr>
+          <a:xfrm>
+            <a:off x="607219" y="814946"/>
+            <a:ext cx="7886700" cy="244004"/>
+          </a:xfrm>
+          <a:prstGeom prst="rect">
+            <a:avLst/>
+          </a:prstGeom>
+          <a:noFill/>
+          <a:ln/>
+        </p:spPr>
+        <p:txBody>
+          <a:bodyPr wrap="none" lIns="0" tIns="0" rIns="0" bIns="0" rtlCol="0" anchor="t">
+            <a:spAutoFit/>
+          </a:bodyPr>
+          <a:lstStyle/>
+          <a:p>
+            <a:pPr marL="0" indent="0" algn="l">
+              <a:lnSpc>
+                <a:spcPct val="97600"/>
+              </a:lnSpc>
+              <a:buNone/>
+            </a:pPr>
+            <a:r>
+              <a:rPr lang="en-US" sz="1500" dirty="0">
+                <a:solidFill>
+                  <a:srgbClr val="2F2F2F"/>
+                </a:solidFill>
+                <a:latin typeface="Calibri" pitchFamily="34" charset="0"/>
+                <a:ea typeface="Calibri" pitchFamily="34" charset="-122"/>
+                <a:cs typeface="Calibri" pitchFamily="34" charset="-120"/>
+              </a:rPr>
+              <a:t>Loops may execute many times; a checker needs a stable stack interface across iterations.</a:t>
+            </a:r>
+            <a:endParaRPr lang="en-US" sz="1500" dirty="0"/>
+          </a:p>
+        </p:txBody>
+      </p:sp>
+      <p:sp>
+        <p:nvSpPr>
+          <p:cNvPr id="5" name="Text 2"/>
+          <p:cNvSpPr/>
+          <p:nvPr/>
+        </p:nvSpPr>
+        <p:spPr>
+          <a:xfrm>
+            <a:off x="607219" y="1180393"/>
+            <a:ext cx="7886700" cy="157163"/>
+          </a:xfrm>
+          <a:prstGeom prst="rect">
+            <a:avLst/>
+          </a:prstGeom>
+          <a:noFill/>
+          <a:ln/>
+        </p:spPr>
+        <p:txBody>
+          <a:bodyPr wrap="square" lIns="0" tIns="0" rIns="0" bIns="0" rtlCol="0" anchor="t">
+            <a:spAutoFit/>
+          </a:bodyPr>
+          <a:lstStyle/>
+          <a:p>
+            <a:pPr marL="0" indent="0" algn="l">
+              <a:buNone/>
+            </a:pPr>
+            <a:r>
+              <a:rPr lang="en-US" sz="900" b="1" kern="0" spc="1" dirty="0">
+                <a:solidFill>
+                  <a:srgbClr val="00A3A1"/>
+                </a:solidFill>
+                <a:latin typeface="Calibri" pitchFamily="34" charset="0"/>
+                <a:ea typeface="Calibri" pitchFamily="34" charset="-122"/>
+                <a:cs typeface="Calibri" pitchFamily="34" charset="-120"/>
+              </a:rPr>
+              <a:t>LOOP INVARIANT</a:t>
+            </a:r>
+            <a:endParaRPr lang="en-US" sz="900" dirty="0"/>
+          </a:p>
+        </p:txBody>
+      </p:sp>
+      <p:sp>
+        <p:nvSpPr>
+          <p:cNvPr id="6" name="Text 3"/>
+          <p:cNvSpPr/>
+          <p:nvPr/>
+        </p:nvSpPr>
+        <p:spPr>
+          <a:xfrm>
+            <a:off x="607219" y="1387562"/>
+            <a:ext cx="7886700" cy="320297"/>
+          </a:xfrm>
+          <a:prstGeom prst="rect">
+            <a:avLst/>
+          </a:prstGeom>
+          <a:noFill/>
+          <a:ln/>
+        </p:spPr>
+        <p:txBody>
+          <a:bodyPr wrap="none" lIns="0" tIns="0" rIns="0" bIns="0" rtlCol="0" anchor="t">
+            <a:spAutoFit/>
+          </a:bodyPr>
+          <a:lstStyle/>
+          <a:p>
+            <a:pPr marL="0" indent="0" algn="l">
+              <a:lnSpc>
+                <a:spcPct val="94400"/>
+              </a:lnSpc>
+              <a:buNone/>
+            </a:pPr>
+            <a:r>
+              <a:rPr lang="en-US" sz="1900" b="1" dirty="0">
+                <a:solidFill>
+                  <a:srgbClr val="003A70"/>
+                </a:solidFill>
+                <a:latin typeface="Courier New" pitchFamily="34" charset="0"/>
+                <a:ea typeface="Courier New" pitchFamily="34" charset="-122"/>
+                <a:cs typeface="Courier New" pitchFamily="34" charset="-120"/>
+              </a:rPr>
+              <a:t>Π* s = s ⊓ (s · s)</a:t>
+            </a:r>
+            <a:endParaRPr lang="en-US" sz="1900" dirty="0"/>
+          </a:p>
+        </p:txBody>
+      </p:sp>
+      <p:sp>
+        <p:nvSpPr>
+          <p:cNvPr id="7" name="Text 4"/>
+          <p:cNvSpPr/>
+          <p:nvPr/>
+        </p:nvSpPr>
+        <p:spPr>
+          <a:xfrm>
+            <a:off x="607219" y="1779296"/>
+            <a:ext cx="7358063" cy="233344"/>
+          </a:xfrm>
+          <a:prstGeom prst="rect">
+            <a:avLst/>
+          </a:prstGeom>
+          <a:noFill/>
+          <a:ln/>
+        </p:spPr>
+        <p:txBody>
+          <a:bodyPr wrap="none" lIns="0" tIns="0" rIns="0" bIns="0" rtlCol="0" anchor="t">
+            <a:spAutoFit/>
+          </a:bodyPr>
+          <a:lstStyle/>
+          <a:p>
+            <a:pPr marL="0" indent="0" algn="l">
+              <a:lnSpc>
+                <a:spcPct val="96800"/>
+              </a:lnSpc>
+              <a:buNone/>
+            </a:pPr>
+            <a:r>
+              <a:rPr lang="en-US" sz="1450" dirty="0">
+                <a:solidFill>
+                  <a:srgbClr val="2F2F2F"/>
+                </a:solidFill>
+                <a:latin typeface="Calibri" pitchFamily="34" charset="0"/>
+                <a:ea typeface="Calibri" pitchFamily="34" charset="-122"/>
+                <a:cs typeface="Calibri" pitchFamily="34" charset="-120"/>
+              </a:rPr>
+              <a:t>The result is an </a:t>
+            </a:r>
+            <a:r>
+              <a:rPr lang="en-US" sz="1350" b="1" dirty="0">
+                <a:solidFill>
+                  <a:srgbClr val="003A70"/>
+                </a:solidFill>
+                <a:latin typeface="Calibri" pitchFamily="34" charset="0"/>
+                <a:ea typeface="Calibri" pitchFamily="34" charset="-122"/>
+                <a:cs typeface="Calibri" pitchFamily="34" charset="-120"/>
+              </a:rPr>
+              <a:t>idempotent element</a:t>
+            </a:r>
+            <a:r>
+              <a:rPr lang="en-US" sz="1450" dirty="0">
+                <a:solidFill>
+                  <a:srgbClr val="2F2F2F"/>
+                </a:solidFill>
+                <a:latin typeface="Calibri" pitchFamily="34" charset="0"/>
+                <a:ea typeface="Calibri" pitchFamily="34" charset="-122"/>
+                <a:cs typeface="Calibri" pitchFamily="34" charset="-120"/>
+              </a:rPr>
+              <a:t> that most precisely describes the loop body </a:t>
+            </a:r>
+            <a:r>
+              <a:rPr lang="en-US" sz="1350" b="1" dirty="0">
+                <a:solidFill>
+                  <a:srgbClr val="003A70"/>
+                </a:solidFill>
+                <a:latin typeface="Calibri" pitchFamily="34" charset="0"/>
+                <a:ea typeface="Calibri" pitchFamily="34" charset="-122"/>
+                <a:cs typeface="Calibri" pitchFamily="34" charset="-120"/>
+              </a:rPr>
+              <a:t>s</a:t>
+            </a:r>
+            <a:r>
+              <a:rPr lang="en-US" sz="1450" dirty="0">
+                <a:solidFill>
+                  <a:srgbClr val="2F2F2F"/>
+                </a:solidFill>
+                <a:latin typeface="Calibri" pitchFamily="34" charset="0"/>
+                <a:ea typeface="Calibri" pitchFamily="34" charset="-122"/>
+                <a:cs typeface="Calibri" pitchFamily="34" charset="-120"/>
+              </a:rPr>
+              <a:t>.</a:t>
+            </a:r>
+            <a:endParaRPr lang="en-US" sz="1450" dirty="0"/>
+          </a:p>
+        </p:txBody>
+      </p:sp>
+      <p:sp>
+        <p:nvSpPr>
+          <p:cNvPr id="8" name="Text 5"/>
+          <p:cNvSpPr/>
+          <p:nvPr/>
+        </p:nvSpPr>
+        <p:spPr>
+          <a:xfrm>
+            <a:off x="607219" y="2105509"/>
+            <a:ext cx="7886700" cy="139303"/>
+          </a:xfrm>
+          <a:prstGeom prst="rect">
+            <a:avLst/>
+          </a:prstGeom>
+          <a:noFill/>
+          <a:ln/>
+        </p:spPr>
+        <p:txBody>
+          <a:bodyPr wrap="square" lIns="0" tIns="0" rIns="0" bIns="0" rtlCol="0" anchor="t">
+            <a:spAutoFit/>
+          </a:bodyPr>
+          <a:lstStyle/>
+          <a:p>
+            <a:pPr marL="0" indent="0" algn="l">
+              <a:buNone/>
+            </a:pPr>
+            <a:r>
+              <a:rPr lang="en-US" sz="800" b="1" kern="0" spc="1" dirty="0">
+                <a:solidFill>
+                  <a:srgbClr val="00A3A1"/>
+                </a:solidFill>
+                <a:latin typeface="Calibri" pitchFamily="34" charset="0"/>
+                <a:ea typeface="Calibri" pitchFamily="34" charset="-122"/>
+                <a:cs typeface="Calibri" pitchFamily="34" charset="-120"/>
+              </a:rPr>
+              <a:t>SL2008 EXAMPLE: test2</a:t>
+            </a:r>
+            <a:endParaRPr lang="en-US" sz="800" dirty="0"/>
+          </a:p>
+        </p:txBody>
+      </p:sp>
+      <p:sp>
+        <p:nvSpPr>
+          <p:cNvPr id="9" name="Text 6"/>
+          <p:cNvSpPr/>
+          <p:nvPr/>
+        </p:nvSpPr>
+        <p:spPr>
+          <a:xfrm>
+            <a:off x="607219" y="2280531"/>
+            <a:ext cx="7886700" cy="196453"/>
+          </a:xfrm>
+          <a:prstGeom prst="rect">
+            <a:avLst/>
+          </a:prstGeom>
+          <a:noFill/>
+          <a:ln/>
+        </p:spPr>
+        <p:txBody>
+          <a:bodyPr wrap="none" lIns="0" tIns="0" rIns="0" bIns="0" rtlCol="0" anchor="t">
+            <a:spAutoFit/>
+          </a:bodyPr>
+          <a:lstStyle/>
+          <a:p>
+            <a:pPr marL="0" indent="0" algn="l">
+              <a:lnSpc>
+                <a:spcPct val="88000"/>
+              </a:lnSpc>
+              <a:buNone/>
+            </a:pPr>
+            <a:r>
+              <a:rPr lang="en-US" sz="1250" b="1" dirty="0">
+                <a:solidFill>
+                  <a:srgbClr val="003A70"/>
+                </a:solidFill>
+                <a:latin typeface="Courier New" pitchFamily="34" charset="0"/>
+                <a:ea typeface="Courier New" pitchFamily="34" charset="-122"/>
+                <a:cs typeface="Courier New" pitchFamily="34" charset="-120"/>
+              </a:rPr>
+              <a:t>: test2</a:t>
+            </a:r>
+            <a:endParaRPr lang="en-US" sz="1250" dirty="0"/>
+          </a:p>
+        </p:txBody>
+      </p:sp>
+      <p:sp>
+        <p:nvSpPr>
+          <p:cNvPr id="10" name="Text 7"/>
+          <p:cNvSpPr/>
+          <p:nvPr/>
+        </p:nvSpPr>
+        <p:spPr>
+          <a:xfrm>
+            <a:off x="607219" y="2484127"/>
+            <a:ext cx="7886700" cy="196453"/>
+          </a:xfrm>
+          <a:prstGeom prst="rect">
+            <a:avLst/>
+          </a:prstGeom>
+          <a:noFill/>
+          <a:ln/>
+        </p:spPr>
+        <p:txBody>
+          <a:bodyPr wrap="none" lIns="340233" tIns="0" rIns="0" bIns="0" rtlCol="0" anchor="t">
+            <a:spAutoFit/>
+          </a:bodyPr>
+          <a:lstStyle/>
+          <a:p>
+            <a:pPr marL="0" indent="0" algn="l">
+              <a:lnSpc>
+                <a:spcPct val="88000"/>
+              </a:lnSpc>
+              <a:buNone/>
+            </a:pPr>
+            <a:r>
+              <a:rPr lang="en-US" sz="1250" b="1" dirty="0">
+                <a:solidFill>
+                  <a:srgbClr val="003A70"/>
+                </a:solidFill>
+                <a:latin typeface="Courier New" pitchFamily="34" charset="0"/>
+                <a:ea typeface="Courier New" pitchFamily="34" charset="-122"/>
+                <a:cs typeface="Courier New" pitchFamily="34" charset="-120"/>
+              </a:rPr>
+              <a:t>BEGIN</a:t>
+            </a:r>
+            <a:endParaRPr lang="en-US" sz="1250" dirty="0"/>
+          </a:p>
+        </p:txBody>
+      </p:sp>
+      <p:sp>
+        <p:nvSpPr>
+          <p:cNvPr id="11" name="Text 8"/>
+          <p:cNvSpPr/>
+          <p:nvPr/>
+        </p:nvSpPr>
+        <p:spPr>
+          <a:xfrm>
+            <a:off x="607219" y="2687724"/>
+            <a:ext cx="7886700" cy="196453"/>
+          </a:xfrm>
+          <a:prstGeom prst="rect">
+            <a:avLst/>
+          </a:prstGeom>
+          <a:noFill/>
+          <a:ln/>
+        </p:spPr>
+        <p:txBody>
+          <a:bodyPr wrap="none" lIns="340233" tIns="0" rIns="0" bIns="0" rtlCol="0" anchor="t">
+            <a:spAutoFit/>
+          </a:bodyPr>
+          <a:lstStyle/>
+          <a:p>
+            <a:pPr marL="0" indent="0" algn="l">
+              <a:lnSpc>
+                <a:spcPct val="88000"/>
+              </a:lnSpc>
+              <a:buNone/>
+            </a:pPr>
+            <a:r>
+              <a:rPr lang="en-US" sz="1250" b="1" dirty="0">
+                <a:solidFill>
+                  <a:srgbClr val="003A70"/>
+                </a:solidFill>
+                <a:latin typeface="Courier New" pitchFamily="34" charset="0"/>
+                <a:ea typeface="Courier New" pitchFamily="34" charset="-122"/>
+                <a:cs typeface="Courier New" pitchFamily="34" charset="-120"/>
+              </a:rPr>
+              <a:t>SWAP OVER</a:t>
+            </a:r>
+            <a:endParaRPr lang="en-US" sz="1250" dirty="0"/>
+          </a:p>
+        </p:txBody>
+      </p:sp>
+      <p:sp>
+        <p:nvSpPr>
+          <p:cNvPr id="12" name="Text 9"/>
+          <p:cNvSpPr/>
+          <p:nvPr/>
+        </p:nvSpPr>
+        <p:spPr>
+          <a:xfrm>
+            <a:off x="607219" y="2891321"/>
+            <a:ext cx="7886700" cy="196453"/>
+          </a:xfrm>
+          <a:prstGeom prst="rect">
+            <a:avLst/>
+          </a:prstGeom>
+          <a:noFill/>
+          <a:ln/>
+        </p:spPr>
+        <p:txBody>
+          <a:bodyPr wrap="none" lIns="340233" tIns="0" rIns="0" bIns="0" rtlCol="0" anchor="t">
+            <a:spAutoFit/>
+          </a:bodyPr>
+          <a:lstStyle/>
+          <a:p>
+            <a:pPr marL="0" indent="0" algn="l">
+              <a:lnSpc>
+                <a:spcPct val="88000"/>
+              </a:lnSpc>
+              <a:buNone/>
+            </a:pPr>
+            <a:r>
+              <a:rPr lang="en-US" sz="1250" b="1" dirty="0">
+                <a:solidFill>
+                  <a:srgbClr val="003A70"/>
+                </a:solidFill>
+                <a:latin typeface="Courier New" pitchFamily="34" charset="0"/>
+                <a:ea typeface="Courier New" pitchFamily="34" charset="-122"/>
+                <a:cs typeface="Courier New" pitchFamily="34" charset="-120"/>
+              </a:rPr>
+              <a:t>WHILE</a:t>
+            </a:r>
+            <a:endParaRPr lang="en-US" sz="1250" dirty="0"/>
+          </a:p>
+        </p:txBody>
+      </p:sp>
+      <p:sp>
+        <p:nvSpPr>
+          <p:cNvPr id="13" name="Text 10"/>
+          <p:cNvSpPr/>
+          <p:nvPr/>
+        </p:nvSpPr>
+        <p:spPr>
+          <a:xfrm>
+            <a:off x="607219" y="3094918"/>
+            <a:ext cx="7886700" cy="196453"/>
+          </a:xfrm>
+          <a:prstGeom prst="rect">
+            <a:avLst/>
+          </a:prstGeom>
+          <a:noFill/>
+          <a:ln/>
+        </p:spPr>
+        <p:txBody>
+          <a:bodyPr wrap="none" lIns="340233" tIns="0" rIns="0" bIns="0" rtlCol="0" anchor="t">
+            <a:spAutoFit/>
+          </a:bodyPr>
+          <a:lstStyle/>
+          <a:p>
+            <a:pPr marL="0" indent="0" algn="l">
+              <a:lnSpc>
+                <a:spcPct val="88000"/>
+              </a:lnSpc>
+              <a:buNone/>
+            </a:pPr>
+            <a:r>
+              <a:rPr lang="en-US" sz="1250" b="1" dirty="0">
+                <a:solidFill>
+                  <a:srgbClr val="003A70"/>
+                </a:solidFill>
+                <a:latin typeface="Courier New" pitchFamily="34" charset="0"/>
+                <a:ea typeface="Courier New" pitchFamily="34" charset="-122"/>
+                <a:cs typeface="Courier New" pitchFamily="34" charset="-120"/>
+              </a:rPr>
+              <a:t>NOT</a:t>
+            </a:r>
+            <a:endParaRPr lang="en-US" sz="1250" dirty="0"/>
+          </a:p>
+        </p:txBody>
+      </p:sp>
+      <p:sp>
+        <p:nvSpPr>
+          <p:cNvPr id="14" name="Text 11"/>
+          <p:cNvSpPr/>
+          <p:nvPr/>
+        </p:nvSpPr>
+        <p:spPr>
+          <a:xfrm>
+            <a:off x="607219" y="3298515"/>
+            <a:ext cx="7886700" cy="196453"/>
+          </a:xfrm>
+          <a:prstGeom prst="rect">
+            <a:avLst/>
+          </a:prstGeom>
+          <a:noFill/>
+          <a:ln/>
+        </p:spPr>
+        <p:txBody>
+          <a:bodyPr wrap="none" lIns="340233" tIns="0" rIns="0" bIns="0" rtlCol="0" anchor="t">
+            <a:spAutoFit/>
+          </a:bodyPr>
+          <a:lstStyle/>
+          <a:p>
+            <a:pPr marL="0" indent="0" algn="l">
+              <a:lnSpc>
+                <a:spcPct val="88000"/>
+              </a:lnSpc>
+              <a:buNone/>
+            </a:pPr>
+            <a:r>
+              <a:rPr lang="en-US" sz="1250" b="1" dirty="0">
+                <a:solidFill>
+                  <a:srgbClr val="003A70"/>
+                </a:solidFill>
+                <a:latin typeface="Courier New" pitchFamily="34" charset="0"/>
+                <a:ea typeface="Courier New" pitchFamily="34" charset="-122"/>
+                <a:cs typeface="Courier New" pitchFamily="34" charset="-120"/>
+              </a:rPr>
+              <a:t>REPEAT ;</a:t>
+            </a:r>
+            <a:endParaRPr lang="en-US" sz="1250" dirty="0"/>
+          </a:p>
+        </p:txBody>
+      </p:sp>
+      <p:sp>
+        <p:nvSpPr>
+          <p:cNvPr id="15" name="Text 12"/>
+          <p:cNvSpPr/>
+          <p:nvPr/>
+        </p:nvSpPr>
+        <p:spPr>
+          <a:xfrm>
+            <a:off x="607219" y="3552118"/>
+            <a:ext cx="7886700" cy="217884"/>
+          </a:xfrm>
+          <a:prstGeom prst="rect">
+            <a:avLst/>
+          </a:prstGeom>
+          <a:noFill/>
+          <a:ln/>
+        </p:spPr>
+        <p:txBody>
+          <a:bodyPr wrap="square" lIns="0" tIns="0" rIns="0" bIns="0" rtlCol="0" anchor="t">
+            <a:spAutoFit/>
+          </a:bodyPr>
+          <a:lstStyle/>
+          <a:p>
+            <a:pPr marL="0" indent="0" algn="l">
+              <a:buNone/>
+            </a:pPr>
+            <a:r>
+              <a:rPr lang="en-US" sz="1350" b="1" dirty="0">
+                <a:solidFill>
+                  <a:srgbClr val="003A70"/>
+                </a:solidFill>
+                <a:latin typeface="Courier New" pitchFamily="34" charset="0"/>
+                <a:ea typeface="Courier New" pitchFamily="34" charset="-122"/>
+                <a:cs typeface="Courier New" pitchFamily="34" charset="-120"/>
+              </a:rPr>
+              <a:t>(flag[1] flag[1] -- flag[1] flag[1])</a:t>
+            </a:r>
+            <a:endParaRPr lang="en-US" sz="1350" dirty="0"/>
+          </a:p>
+        </p:txBody>
+      </p:sp>
+      <p:sp>
+        <p:nvSpPr>
+          <p:cNvPr id="16" name="Text 13"/>
+          <p:cNvSpPr/>
+          <p:nvPr/>
+        </p:nvSpPr>
+        <p:spPr>
+          <a:xfrm>
+            <a:off x="8378056" y="4997053"/>
+            <a:ext cx="115863" cy="139303"/>
+          </a:xfrm>
+          <a:prstGeom prst="rect">
+            <a:avLst/>
+          </a:prstGeom>
+          <a:noFill/>
+          <a:ln/>
+        </p:spPr>
+        <p:txBody>
+          <a:bodyPr wrap="none" lIns="0" tIns="0" rIns="0" bIns="0" rtlCol="0" anchor="t">
+            <a:spAutoFit/>
+          </a:bodyPr>
+          <a:lstStyle/>
+          <a:p>
+            <a:pPr marL="0" indent="0" algn="l">
+              <a:buNone/>
+            </a:pPr>
+            <a:r>
+              <a:rPr lang="en-US" sz="850" dirty="0">
+                <a:solidFill>
+                  <a:srgbClr val="888888"/>
+                </a:solidFill>
+                <a:latin typeface="Calibri" pitchFamily="34" charset="0"/>
+                <a:ea typeface="Calibri" pitchFamily="34" charset="-122"/>
+                <a:cs typeface="Calibri" pitchFamily="34" charset="-120"/>
+              </a:rPr>
+              <a:t>10</a:t>
             </a:r>
             <a:endParaRPr lang="en-US" sz="850" dirty="0"/>
           </a:p>
@@ -8883,4 +8174,299 @@
     </a:ext>
   </a:extLst>
 </a:theme>
+</file>
+
+<file path=ppt/theme/theme2.xml><?xml version="1.0" encoding="utf-8"?>
+<a:theme xmlns:a="http://schemas.openxmlformats.org/drawingml/2006/main" name="Office Theme">
+  <a:themeElements>
+    <a:clrScheme name="Office">
+      <a:dk1>
+        <a:sysClr val="windowText" lastClr="000000"/>
+      </a:dk1>
+      <a:lt1>
+        <a:sysClr val="window" lastClr="FFFFFF"/>
+      </a:lt1>
+      <a:dk2>
+        <a:srgbClr val="44546A"/>
+      </a:dk2>
+      <a:lt2>
+        <a:srgbClr val="E7E6E6"/>
+      </a:lt2>
+      <a:accent1>
+        <a:srgbClr val="4472C4"/>
+      </a:accent1>
+      <a:accent2>
+        <a:srgbClr val="ED7D31"/>
+      </a:accent2>
+      <a:accent3>
+        <a:srgbClr val="A5A5A5"/>
+      </a:accent3>
+      <a:accent4>
+        <a:srgbClr val="FFC000"/>
+      </a:accent4>
+      <a:accent5>
+        <a:srgbClr val="5B9BD5"/>
+      </a:accent5>
+      <a:accent6>
+        <a:srgbClr val="70AD47"/>
+      </a:accent6>
+      <a:hlink>
+        <a:srgbClr val="0563C1"/>
+      </a:hlink>
+      <a:folHlink>
+        <a:srgbClr val="954F72"/>
+      </a:folHlink>
+    </a:clrScheme>
+    <a:fontScheme name="Office">
+      <a:majorFont>
+        <a:latin typeface="Calibri Light" panose="020F0302020204030204"/>
+        <a:ea typeface=""/>
+        <a:cs typeface=""/>
+        <a:font script="Jpan" typeface="游ゴシック Light"/>
+        <a:font script="Hang" typeface="맑은 고딕"/>
+        <a:font script="Hans" typeface="等线 Light"/>
+        <a:font script="Hant" typeface="新細明體"/>
+        <a:font script="Arab" typeface="Times New Roman"/>
+        <a:font script="Hebr" typeface="Times New Roman"/>
+        <a:font script="Thai" typeface="Angsana New"/>
+        <a:font script="Ethi" typeface="Nyala"/>
+        <a:font script="Beng" typeface="Vrinda"/>
+        <a:font script="Gujr" typeface="Shruti"/>
+        <a:font script="Khmr" typeface="MoolBoran"/>
+        <a:font script="Knda" typeface="Tunga"/>
+        <a:font script="Guru" typeface="Raavi"/>
+        <a:font script="Cans" typeface="Euphemia"/>
+        <a:font script="Cher" typeface="Plantagenet Cherokee"/>
+        <a:font script="Yiii" typeface="Microsoft Yi Baiti"/>
+        <a:font script="Tibt" typeface="Microsoft Himalaya"/>
+        <a:font script="Thaa" typeface="MV Boli"/>
+        <a:font script="Deva" typeface="Mangal"/>
+        <a:font script="Telu" typeface="Gautami"/>
+        <a:font script="Taml" typeface="Latha"/>
+        <a:font script="Syrc" typeface="Estrangelo Edessa"/>
+        <a:font script="Orya" typeface="Kalinga"/>
+        <a:font script="Mlym" typeface="Kartika"/>
+        <a:font script="Laoo" typeface="DokChampa"/>
+        <a:font script="Sinh" typeface="Iskoola Pota"/>
+        <a:font script="Mong" typeface="Mongolian Baiti"/>
+        <a:font script="Viet" typeface="Times New Roman"/>
+        <a:font script="Uigh" typeface="Microsoft Uighur"/>
+        <a:font script="Geor" typeface="Sylfaen"/>
+        <a:font script="Armn" typeface="Arial"/>
+        <a:font script="Bugi" typeface="Leelawadee UI"/>
+        <a:font script="Bopo" typeface="Microsoft JhengHei"/>
+        <a:font script="Java" typeface="Javanese Text"/>
+        <a:font script="Lisu" typeface="Segoe UI"/>
+        <a:font script="Mymr" typeface="Myanmar Text"/>
+        <a:font script="Nkoo" typeface="Ebrima"/>
+        <a:font script="Olck" typeface="Nirmala UI"/>
+        <a:font script="Osma" typeface="Ebrima"/>
+        <a:font script="Phag" typeface="Phagspa"/>
+        <a:font script="Syrn" typeface="Estrangelo Edessa"/>
+        <a:font script="Syrj" typeface="Estrangelo Edessa"/>
+        <a:font script="Syre" typeface="Estrangelo Edessa"/>
+        <a:font script="Sora" typeface="Nirmala UI"/>
+        <a:font script="Tale" typeface="Microsoft Tai Le"/>
+        <a:font script="Talu" typeface="Microsoft New Tai Lue"/>
+        <a:font script="Tfng" typeface="Ebrima"/>
+      </a:majorFont>
+      <a:minorFont>
+        <a:latin typeface="Calibri" panose="020F0502020204030204"/>
+        <a:ea typeface=""/>
+        <a:cs typeface=""/>
+        <a:font script="Jpan" typeface="游ゴシック"/>
+        <a:font script="Hang" typeface="맑은 고딕"/>
+        <a:font script="Hans" typeface="等线"/>
+        <a:font script="Hant" typeface="新細明體"/>
+        <a:font script="Arab" typeface="Arial"/>
+        <a:font script="Hebr" typeface="Arial"/>
+        <a:font script="Thai" typeface="Cordia New"/>
+        <a:font script="Ethi" typeface="Nyala"/>
+        <a:font script="Beng" typeface="Vrinda"/>
+        <a:font script="Gujr" typeface="Shruti"/>
+        <a:font script="Khmr" typeface="DaunPenh"/>
+        <a:font script="Knda" typeface="Tunga"/>
+        <a:font script="Guru" typeface="Raavi"/>
+        <a:font script="Cans" typeface="Euphemia"/>
+        <a:font script="Cher" typeface="Plantagenet Cherokee"/>
+        <a:font script="Yiii" typeface="Microsoft Yi Baiti"/>
+        <a:font script="Tibt" typeface="Microsoft Himalaya"/>
+        <a:font script="Thaa" typeface="MV Boli"/>
+        <a:font script="Deva" typeface="Mangal"/>
+        <a:font script="Telu" typeface="Gautami"/>
+        <a:font script="Taml" typeface="Latha"/>
+        <a:font script="Syrc" typeface="Estrangelo Edessa"/>
+        <a:font script="Orya" typeface="Kalinga"/>
+        <a:font script="Mlym" typeface="Kartika"/>
+        <a:font script="Laoo" typeface="DokChampa"/>
+        <a:font script="Sinh" typeface="Iskoola Pota"/>
+        <a:font script="Mong" typeface="Mongolian Baiti"/>
+        <a:font script="Viet" typeface="Arial"/>
+        <a:font script="Uigh" typeface="Microsoft Uighur"/>
+        <a:font script="Geor" typeface="Sylfaen"/>
+        <a:font script="Armn" typeface="Arial"/>
+        <a:font script="Bugi" typeface="Leelawadee UI"/>
+        <a:font script="Bopo" typeface="Microsoft JhengHei"/>
+        <a:font script="Java" typeface="Javanese Text"/>
+        <a:font script="Lisu" typeface="Segoe UI"/>
+        <a:font script="Mymr" typeface="Myanmar Text"/>
+        <a:font script="Nkoo" typeface="Ebrima"/>
+        <a:font script="Olck" typeface="Nirmala UI"/>
+        <a:font script="Osma" typeface="Ebrima"/>
+        <a:font script="Phag" typeface="Phagspa"/>
+        <a:font script="Syrn" typeface="Estrangelo Edessa"/>
+        <a:font script="Syrj" typeface="Estrangelo Edessa"/>
+        <a:font script="Syre" typeface="Estrangelo Edessa"/>
+        <a:font script="Sora" typeface="Nirmala UI"/>
+        <a:font script="Tale" typeface="Microsoft Tai Le"/>
+        <a:font script="Talu" typeface="Microsoft New Tai Lue"/>
+        <a:font script="Tfng" typeface="Ebrima"/>
+      </a:minorFont>
+    </a:fontScheme>
+    <a:fmtScheme name="Office">
+      <a:fillStyleLst>
+        <a:solidFill>
+          <a:schemeClr val="phClr"/>
+        </a:solidFill>
+        <a:gradFill rotWithShape="1">
+          <a:gsLst>
+            <a:gs pos="0">
+              <a:schemeClr val="phClr">
+                <a:lumMod val="110000"/>
+                <a:satMod val="105000"/>
+                <a:tint val="67000"/>
+              </a:schemeClr>
+            </a:gs>
+            <a:gs pos="50000">
+              <a:schemeClr val="phClr">
+                <a:lumMod val="105000"/>
+                <a:satMod val="103000"/>
+                <a:tint val="73000"/>
+              </a:schemeClr>
+            </a:gs>
+            <a:gs pos="100000">
+              <a:schemeClr val="phClr">
+                <a:lumMod val="105000"/>
+                <a:satMod val="109000"/>
+                <a:tint val="81000"/>
+              </a:schemeClr>
+            </a:gs>
+          </a:gsLst>
+          <a:lin ang="5400000" scaled="0"/>
+        </a:gradFill>
+        <a:gradFill rotWithShape="1">
+          <a:gsLst>
+            <a:gs pos="0">
+              <a:schemeClr val="phClr">
+                <a:satMod val="103000"/>
+                <a:lumMod val="102000"/>
+                <a:tint val="94000"/>
+              </a:schemeClr>
+            </a:gs>
+            <a:gs pos="50000">
+              <a:schemeClr val="phClr">
+                <a:satMod val="110000"/>
+                <a:lumMod val="100000"/>
+                <a:shade val="100000"/>
+              </a:schemeClr>
+            </a:gs>
+            <a:gs pos="100000">
+              <a:schemeClr val="phClr">
+                <a:lumMod val="99000"/>
+                <a:satMod val="120000"/>
+                <a:shade val="78000"/>
+              </a:schemeClr>
+            </a:gs>
+          </a:gsLst>
+          <a:lin ang="5400000" scaled="0"/>
+        </a:gradFill>
+      </a:fillStyleLst>
+      <a:lnStyleLst>
+        <a:ln w="6350" cap="flat" cmpd="sng" algn="ctr">
+          <a:solidFill>
+            <a:schemeClr val="phClr"/>
+          </a:solidFill>
+          <a:prstDash val="solid"/>
+          <a:miter lim="800000"/>
+        </a:ln>
+        <a:ln w="12700" cap="flat" cmpd="sng" algn="ctr">
+          <a:solidFill>
+            <a:schemeClr val="phClr"/>
+          </a:solidFill>
+          <a:prstDash val="solid"/>
+          <a:miter lim="800000"/>
+        </a:ln>
+        <a:ln w="19050" cap="flat" cmpd="sng" algn="ctr">
+          <a:solidFill>
+            <a:schemeClr val="phClr"/>
+          </a:solidFill>
+          <a:prstDash val="solid"/>
+          <a:miter lim="800000"/>
+        </a:ln>
+      </a:lnStyleLst>
+      <a:effectStyleLst>
+        <a:effectStyle>
+          <a:effectLst/>
+        </a:effectStyle>
+        <a:effectStyle>
+          <a:effectLst/>
+        </a:effectStyle>
+        <a:effectStyle>
+          <a:effectLst>
+            <a:outerShdw blurRad="57150" dist="19050" dir="5400000" algn="ctr" rotWithShape="0">
+              <a:srgbClr val="000000">
+                <a:alpha val="63000"/>
+              </a:srgbClr>
+            </a:outerShdw>
+          </a:effectLst>
+        </a:effectStyle>
+      </a:effectStyleLst>
+      <a:bgFillStyleLst>
+        <a:solidFill>
+          <a:schemeClr val="phClr"/>
+        </a:solidFill>
+        <a:solidFill>
+          <a:schemeClr val="phClr">
+            <a:tint val="95000"/>
+            <a:satMod val="170000"/>
+          </a:schemeClr>
+        </a:solidFill>
+        <a:gradFill rotWithShape="1">
+          <a:gsLst>
+            <a:gs pos="0">
+              <a:schemeClr val="phClr">
+                <a:tint val="93000"/>
+                <a:satMod val="150000"/>
+                <a:shade val="98000"/>
+                <a:lumMod val="102000"/>
+              </a:schemeClr>
+            </a:gs>
+            <a:gs pos="50000">
+              <a:schemeClr val="phClr">
+                <a:tint val="98000"/>
+                <a:satMod val="130000"/>
+                <a:shade val="90000"/>
+                <a:lumMod val="103000"/>
+              </a:schemeClr>
+            </a:gs>
+            <a:gs pos="100000">
+              <a:schemeClr val="phClr">
+                <a:shade val="63000"/>
+                <a:satMod val="120000"/>
+              </a:schemeClr>
+            </a:gs>
+          </a:gsLst>
+          <a:lin ang="5400000" scaled="0"/>
+        </a:gradFill>
+      </a:bgFillStyleLst>
+    </a:fmtScheme>
+  </a:themeElements>
+  <a:objectDefaults/>
+  <a:extraClrSchemeLst/>
+  <a:extLst>
+    <a:ext uri="{05A4C25C-085E-4340-85A3-A5531E510DB2}">
+      <thm15:themeFamily xmlns:thm15="http://schemas.microsoft.com/office/thememl/2012/main" name="Office Theme" id="{62F939B6-93AF-4DB8-9C6B-D6C7DFDC589F}" vid="{4A3C46E8-61CC-4603-A589-7422A47A8E4A}"/>
+    </a:ext>
+  </a:extLst>
+</a:theme>
 </file>
--- a/Configurable_Static_Type_Checking_for_Forth.pptx
+++ b/Configurable_Static_Type_Checking_for_Forth.pptx
@@ -6692,7 +6692,7 @@
                 <a:ea typeface="Courier New" pitchFamily="34" charset="-122"/>
                 <a:cs typeface="Courier New" pitchFamily="34" charset="-120"/>
               </a:rPr>
-              <a:t>a₃ = min(a₁,a₂), b₃ = min(b₁,b₂), c₃ = min(c₁,c₂)</a:t>
+              <a:t>inputs choose subtype; outputs choose supertype</a:t>
             </a:r>
             <a:endParaRPr lang="en-US" sz="1300" dirty="0"/>
           </a:p>
@@ -6736,7 +6736,7 @@
                 <a:ea typeface="Courier New" pitchFamily="34" charset="-122"/>
                 <a:cs typeface="Courier New" pitchFamily="34" charset="-120"/>
               </a:rPr>
-              <a:t>(c₁a₁ → c₂b₁) ⊓ (a₂ → b₂) = (c₃a₃ → c₃b₃)</a:t>
+              <a:t>identities survive only when both paths agree</a:t>
             </a:r>
             <a:endParaRPr lang="en-US" sz="1300" dirty="0"/>
           </a:p>
@@ -6780,7 +6780,7 @@
                 <a:ea typeface="Calibri" pitchFamily="34" charset="-122"/>
                 <a:cs typeface="Calibri" pitchFamily="34" charset="-120"/>
               </a:rPr>
-              <a:t>Applicable when the corresponding type lists are related elementwise; otherwise the result is zero.</a:t>
+              <a:t>Implicit deep prefixes align; incomparable positions yield zero.</a:t>
             </a:r>
             <a:endParaRPr lang="en-US" sz="1300" dirty="0"/>
           </a:p>
@@ -7129,7 +7129,7 @@
                 <a:ea typeface="Courier New" pitchFamily="34" charset="-122"/>
                 <a:cs typeface="Courier New" pitchFamily="34" charset="-120"/>
               </a:rPr>
-              <a:t>(a-addr[1] a-addr[1] a-addr[1] -- a-addr[1] a-addr[1] a-addr[1])</a:t>
+              <a:t>(x x a-addr flag -- x x x)</a:t>
             </a:r>
             <a:endParaRPr lang="en-US" sz="1250" dirty="0"/>
           </a:p>
@@ -7741,7 +7741,7 @@
                 <a:ea typeface="Courier New" pitchFamily="34" charset="-122"/>
                 <a:cs typeface="Courier New" pitchFamily="34" charset="-120"/>
               </a:rPr>
-              <a:t>NOT</a:t>
+              <a:t>INVERT</a:t>
             </a:r>
             <a:endParaRPr lang="en-US" sz="1250" dirty="0"/>
           </a:p>
@@ -7826,7 +7826,7 @@
                 <a:ea typeface="Courier New" pitchFamily="34" charset="-122"/>
                 <a:cs typeface="Courier New" pitchFamily="34" charset="-120"/>
               </a:rPr>
-              <a:t>(flag[1] flag[1] -- flag[1] flag[1])</a:t>
+              <a:t>(flag flag -- flag flag)</a:t>
             </a:r>
             <a:endParaRPr lang="en-US" sz="1350" dirty="0"/>
           </a:p>
